--- a/Mango-M32F4/23.통신프로토콜/통신프로토콜.pptx
+++ b/Mango-M32F4/23.통신프로토콜/통신프로토콜.pptx
@@ -6311,6 +6311,22 @@
             <a:endParaRPr lang="en-US" altLang="ko-KR" b="0" i="0" kern="0" dirty="0"/>
           </a:p>
           <a:p>
+            <a:r>
+              <a:rPr lang="en-US" altLang="ko-KR" b="0" i="0" kern="0" dirty="0"/>
+              <a:t>J12</a:t>
+            </a:r>
+            <a:r>
+              <a:rPr lang="ko-KR" altLang="en-US" b="0" i="0" kern="0" dirty="0"/>
+              <a:t> 점퍼 연결 필요 </a:t>
+            </a:r>
+            <a:r>
+              <a:rPr lang="en-US" altLang="ko-KR" b="0" i="0" kern="0" dirty="0"/>
+              <a:t>– 120</a:t>
+            </a:r>
+            <a:r>
+              <a:rPr lang="ko-KR" altLang="en-US" b="0" i="0" kern="0"/>
+              <a:t>옴 종단 저항</a:t>
+            </a:r>
             <a:endParaRPr lang="en-US" altLang="ko-KR" b="0" i="0" kern="0" dirty="0"/>
           </a:p>
         </p:txBody>

--- a/Mango-M32F4/23.통신프로토콜/통신프로토콜.pptx
+++ b/Mango-M32F4/23.통신프로토콜/통신프로토콜.pptx
@@ -5,10 +5,10 @@
     <p:sldMasterId id="2147483649" r:id="rId1"/>
   </p:sldMasterIdLst>
   <p:notesMasterIdLst>
-    <p:notesMasterId r:id="rId55"/>
+    <p:notesMasterId r:id="rId57"/>
   </p:notesMasterIdLst>
   <p:handoutMasterIdLst>
-    <p:handoutMasterId r:id="rId56"/>
+    <p:handoutMasterId r:id="rId58"/>
   </p:handoutMasterIdLst>
   <p:sldIdLst>
     <p:sldId id="308" r:id="rId2"/>
@@ -41,29 +41,31 @@
     <p:sldId id="438" r:id="rId29"/>
     <p:sldId id="439" r:id="rId30"/>
     <p:sldId id="440" r:id="rId31"/>
-    <p:sldId id="443" r:id="rId32"/>
-    <p:sldId id="444" r:id="rId33"/>
-    <p:sldId id="445" r:id="rId34"/>
-    <p:sldId id="446" r:id="rId35"/>
-    <p:sldId id="447" r:id="rId36"/>
-    <p:sldId id="449" r:id="rId37"/>
-    <p:sldId id="451" r:id="rId38"/>
-    <p:sldId id="450" r:id="rId39"/>
-    <p:sldId id="452" r:id="rId40"/>
-    <p:sldId id="453" r:id="rId41"/>
-    <p:sldId id="454" r:id="rId42"/>
-    <p:sldId id="455" r:id="rId43"/>
-    <p:sldId id="456" r:id="rId44"/>
-    <p:sldId id="457" r:id="rId45"/>
-    <p:sldId id="458" r:id="rId46"/>
-    <p:sldId id="459" r:id="rId47"/>
-    <p:sldId id="460" r:id="rId48"/>
-    <p:sldId id="461" r:id="rId49"/>
-    <p:sldId id="462" r:id="rId50"/>
-    <p:sldId id="463" r:id="rId51"/>
-    <p:sldId id="464" r:id="rId52"/>
-    <p:sldId id="465" r:id="rId53"/>
-    <p:sldId id="466" r:id="rId54"/>
+    <p:sldId id="467" r:id="rId32"/>
+    <p:sldId id="443" r:id="rId33"/>
+    <p:sldId id="444" r:id="rId34"/>
+    <p:sldId id="445" r:id="rId35"/>
+    <p:sldId id="446" r:id="rId36"/>
+    <p:sldId id="447" r:id="rId37"/>
+    <p:sldId id="449" r:id="rId38"/>
+    <p:sldId id="451" r:id="rId39"/>
+    <p:sldId id="450" r:id="rId40"/>
+    <p:sldId id="468" r:id="rId41"/>
+    <p:sldId id="452" r:id="rId42"/>
+    <p:sldId id="453" r:id="rId43"/>
+    <p:sldId id="454" r:id="rId44"/>
+    <p:sldId id="455" r:id="rId45"/>
+    <p:sldId id="456" r:id="rId46"/>
+    <p:sldId id="457" r:id="rId47"/>
+    <p:sldId id="458" r:id="rId48"/>
+    <p:sldId id="459" r:id="rId49"/>
+    <p:sldId id="460" r:id="rId50"/>
+    <p:sldId id="461" r:id="rId51"/>
+    <p:sldId id="462" r:id="rId52"/>
+    <p:sldId id="463" r:id="rId53"/>
+    <p:sldId id="464" r:id="rId54"/>
+    <p:sldId id="465" r:id="rId55"/>
+    <p:sldId id="466" r:id="rId56"/>
   </p:sldIdLst>
   <p:sldSz cx="9144000" cy="6858000" type="screen4x3"/>
   <p:notesSz cx="6799263" cy="9929813"/>
@@ -11795,6 +11797,326 @@
         <p:cNvPr id="1" name="">
           <a:extLst>
             <a:ext uri="{FF2B5EF4-FFF2-40B4-BE49-F238E27FC236}">
+              <a16:creationId xmlns:a16="http://schemas.microsoft.com/office/drawing/2014/main" id="{C05E14AF-96D8-52B4-7EC6-F2F6E6F2D4E4}"/>
+            </a:ext>
+          </a:extLst>
+        </p:cNvPr>
+        <p:cNvGrpSpPr/>
+        <p:nvPr/>
+      </p:nvGrpSpPr>
+      <p:grpSpPr>
+        <a:xfrm>
+          <a:off x="0" y="0"/>
+          <a:ext cx="0" cy="0"/>
+          <a:chOff x="0" y="0"/>
+          <a:chExt cx="0" cy="0"/>
+        </a:xfrm>
+      </p:grpSpPr>
+      <p:sp>
+        <p:nvSpPr>
+          <p:cNvPr id="2" name="제목 1">
+            <a:extLst>
+              <a:ext uri="{FF2B5EF4-FFF2-40B4-BE49-F238E27FC236}">
+                <a16:creationId xmlns:a16="http://schemas.microsoft.com/office/drawing/2014/main" id="{6B4FDDFA-B4F7-7B2C-8BF1-5EA16C852F4F}"/>
+              </a:ext>
+            </a:extLst>
+          </p:cNvPr>
+          <p:cNvSpPr>
+            <a:spLocks noGrp="1"/>
+          </p:cNvSpPr>
+          <p:nvPr>
+            <p:ph type="title"/>
+          </p:nvPr>
+        </p:nvSpPr>
+        <p:spPr/>
+        <p:txBody>
+          <a:bodyPr/>
+          <a:lstStyle/>
+          <a:p>
+            <a:r>
+              <a:rPr lang="en-US" altLang="ko-KR" dirty="0"/>
+              <a:t>USB </a:t>
+            </a:r>
+            <a:r>
+              <a:rPr lang="ko-KR" altLang="en-US" dirty="0"/>
+              <a:t>패킷 분석</a:t>
+            </a:r>
+          </a:p>
+        </p:txBody>
+      </p:sp>
+      <p:sp>
+        <p:nvSpPr>
+          <p:cNvPr id="3" name="Content Placeholder 2">
+            <a:extLst>
+              <a:ext uri="{FF2B5EF4-FFF2-40B4-BE49-F238E27FC236}">
+                <a16:creationId xmlns:a16="http://schemas.microsoft.com/office/drawing/2014/main" id="{A3D55945-4EE1-8EC4-2AB6-AF5B527DE966}"/>
+              </a:ext>
+            </a:extLst>
+          </p:cNvPr>
+          <p:cNvSpPr txBox="1">
+            <a:spLocks/>
+          </p:cNvSpPr>
+          <p:nvPr/>
+        </p:nvSpPr>
+        <p:spPr bwMode="auto">
+          <a:xfrm>
+            <a:off x="628650" y="692696"/>
+            <a:ext cx="7886700" cy="5544616"/>
+          </a:xfrm>
+          <a:prstGeom prst="rect">
+            <a:avLst/>
+          </a:prstGeom>
+          <a:noFill/>
+          <a:ln w="9525">
+            <a:noFill/>
+            <a:miter lim="800000"/>
+            <a:headEnd/>
+            <a:tailEnd/>
+          </a:ln>
+          <a:effectLst/>
+        </p:spPr>
+        <p:txBody>
+          <a:bodyPr vert="horz" wrap="square" lIns="91440" tIns="45720" rIns="91440" bIns="45720" numCol="1" anchor="t" anchorCtr="0" compatLnSpc="1">
+            <a:prstTxWarp prst="textNoShape">
+              <a:avLst/>
+            </a:prstTxWarp>
+            <a:normAutofit/>
+          </a:bodyPr>
+          <a:lstStyle>
+            <a:lvl1pPr marL="342900" indent="-342900" algn="l" rtl="0" fontAlgn="base" latinLnBrk="1">
+              <a:spcBef>
+                <a:spcPct val="20000"/>
+              </a:spcBef>
+              <a:spcAft>
+                <a:spcPct val="0"/>
+              </a:spcAft>
+              <a:buClr>
+                <a:schemeClr val="tx1"/>
+              </a:buClr>
+              <a:buChar char="•"/>
+              <a:defRPr kumimoji="1" sz="2000">
+                <a:solidFill>
+                  <a:schemeClr val="tx1"/>
+                </a:solidFill>
+                <a:latin typeface="Verdana" pitchFamily="34" charset="0"/>
+                <a:ea typeface="+mn-ea"/>
+                <a:cs typeface="+mn-cs"/>
+              </a:defRPr>
+            </a:lvl1pPr>
+            <a:lvl2pPr marL="742950" indent="-285750" algn="l" rtl="0" fontAlgn="base" latinLnBrk="1">
+              <a:spcBef>
+                <a:spcPct val="20000"/>
+              </a:spcBef>
+              <a:spcAft>
+                <a:spcPct val="0"/>
+              </a:spcAft>
+              <a:buClr>
+                <a:schemeClr val="tx1"/>
+              </a:buClr>
+              <a:buFont typeface="Wingdings" pitchFamily="2" charset="2"/>
+              <a:buChar char="Ø"/>
+              <a:defRPr kumimoji="1">
+                <a:solidFill>
+                  <a:schemeClr val="tx1"/>
+                </a:solidFill>
+                <a:latin typeface="Verdana" pitchFamily="34" charset="0"/>
+                <a:ea typeface="+mn-ea"/>
+              </a:defRPr>
+            </a:lvl2pPr>
+            <a:lvl3pPr marL="1143000" indent="-228600" algn="l" rtl="0" fontAlgn="base" latinLnBrk="1">
+              <a:spcBef>
+                <a:spcPct val="20000"/>
+              </a:spcBef>
+              <a:spcAft>
+                <a:spcPct val="0"/>
+              </a:spcAft>
+              <a:buClr>
+                <a:schemeClr val="tx1"/>
+              </a:buClr>
+              <a:buFont typeface="Wingdings" pitchFamily="2" charset="2"/>
+              <a:buChar char="§"/>
+              <a:defRPr kumimoji="1" sz="1600">
+                <a:solidFill>
+                  <a:schemeClr val="tx1"/>
+                </a:solidFill>
+                <a:latin typeface="Verdana" pitchFamily="34" charset="0"/>
+                <a:ea typeface="+mn-ea"/>
+              </a:defRPr>
+            </a:lvl3pPr>
+            <a:lvl4pPr marL="1600200" indent="-228600" algn="l" rtl="0" fontAlgn="base" latinLnBrk="1">
+              <a:spcBef>
+                <a:spcPct val="20000"/>
+              </a:spcBef>
+              <a:spcAft>
+                <a:spcPct val="0"/>
+              </a:spcAft>
+              <a:buClr>
+                <a:schemeClr val="bg2"/>
+              </a:buClr>
+              <a:buFont typeface="Wingdings 2" pitchFamily="18" charset="2"/>
+              <a:buChar char=""/>
+              <a:defRPr kumimoji="1" sz="2000">
+                <a:solidFill>
+                  <a:schemeClr val="tx1"/>
+                </a:solidFill>
+                <a:latin typeface="Verdana" pitchFamily="34" charset="0"/>
+                <a:ea typeface="+mn-ea"/>
+              </a:defRPr>
+            </a:lvl4pPr>
+            <a:lvl5pPr marL="2057400" indent="-228600" algn="l" rtl="0" fontAlgn="base" latinLnBrk="1">
+              <a:spcBef>
+                <a:spcPct val="20000"/>
+              </a:spcBef>
+              <a:spcAft>
+                <a:spcPct val="0"/>
+              </a:spcAft>
+              <a:buClr>
+                <a:schemeClr val="bg2"/>
+              </a:buClr>
+              <a:buFont typeface="Arial" charset="0"/>
+              <a:buChar char="»"/>
+              <a:defRPr kumimoji="1" sz="1600">
+                <a:solidFill>
+                  <a:schemeClr val="tx1"/>
+                </a:solidFill>
+                <a:latin typeface="Verdana" pitchFamily="34" charset="0"/>
+                <a:ea typeface="+mn-ea"/>
+              </a:defRPr>
+            </a:lvl5pPr>
+            <a:lvl6pPr marL="2514600" indent="-228600" algn="l" rtl="0" fontAlgn="base" latinLnBrk="1">
+              <a:spcBef>
+                <a:spcPct val="20000"/>
+              </a:spcBef>
+              <a:spcAft>
+                <a:spcPct val="0"/>
+              </a:spcAft>
+              <a:buClr>
+                <a:schemeClr val="bg2"/>
+              </a:buClr>
+              <a:buFont typeface="Arial" charset="0"/>
+              <a:buChar char="»"/>
+              <a:defRPr kumimoji="1" sz="1600">
+                <a:solidFill>
+                  <a:schemeClr val="tx1"/>
+                </a:solidFill>
+                <a:latin typeface="Arial" charset="0"/>
+                <a:ea typeface="+mn-ea"/>
+              </a:defRPr>
+            </a:lvl6pPr>
+            <a:lvl7pPr marL="2971800" indent="-228600" algn="l" rtl="0" fontAlgn="base" latinLnBrk="1">
+              <a:spcBef>
+                <a:spcPct val="20000"/>
+              </a:spcBef>
+              <a:spcAft>
+                <a:spcPct val="0"/>
+              </a:spcAft>
+              <a:buClr>
+                <a:schemeClr val="bg2"/>
+              </a:buClr>
+              <a:buFont typeface="Arial" charset="0"/>
+              <a:buChar char="»"/>
+              <a:defRPr kumimoji="1" sz="1600">
+                <a:solidFill>
+                  <a:schemeClr val="tx1"/>
+                </a:solidFill>
+                <a:latin typeface="Arial" charset="0"/>
+                <a:ea typeface="+mn-ea"/>
+              </a:defRPr>
+            </a:lvl7pPr>
+            <a:lvl8pPr marL="3429000" indent="-228600" algn="l" rtl="0" fontAlgn="base" latinLnBrk="1">
+              <a:spcBef>
+                <a:spcPct val="20000"/>
+              </a:spcBef>
+              <a:spcAft>
+                <a:spcPct val="0"/>
+              </a:spcAft>
+              <a:buClr>
+                <a:schemeClr val="bg2"/>
+              </a:buClr>
+              <a:buFont typeface="Arial" charset="0"/>
+              <a:buChar char="»"/>
+              <a:defRPr kumimoji="1" sz="1600">
+                <a:solidFill>
+                  <a:schemeClr val="tx1"/>
+                </a:solidFill>
+                <a:latin typeface="Arial" charset="0"/>
+                <a:ea typeface="+mn-ea"/>
+              </a:defRPr>
+            </a:lvl8pPr>
+            <a:lvl9pPr marL="3886200" indent="-228600" algn="l" rtl="0" fontAlgn="base" latinLnBrk="1">
+              <a:spcBef>
+                <a:spcPct val="20000"/>
+              </a:spcBef>
+              <a:spcAft>
+                <a:spcPct val="0"/>
+              </a:spcAft>
+              <a:buClr>
+                <a:schemeClr val="bg2"/>
+              </a:buClr>
+              <a:buFont typeface="Arial" charset="0"/>
+              <a:buChar char="»"/>
+              <a:defRPr kumimoji="1" sz="1600">
+                <a:solidFill>
+                  <a:schemeClr val="tx1"/>
+                </a:solidFill>
+                <a:latin typeface="Arial" charset="0"/>
+                <a:ea typeface="+mn-ea"/>
+              </a:defRPr>
+            </a:lvl9pPr>
+          </a:lstStyle>
+          <a:p>
+            <a:r>
+              <a:rPr lang="en-US" altLang="ko-KR" b="0" i="0" kern="0" dirty="0" err="1"/>
+              <a:t>WireShark</a:t>
+            </a:r>
+            <a:r>
+              <a:rPr lang="en-US" altLang="ko-KR" b="0" i="0" kern="0" dirty="0"/>
+              <a:t> + </a:t>
+            </a:r>
+            <a:r>
+              <a:rPr lang="en-US" altLang="ko-KR" b="0" i="0" kern="0" dirty="0" err="1"/>
+              <a:t>USBCap</a:t>
+            </a:r>
+            <a:endParaRPr lang="ko-KR" altLang="en-US" b="0" i="0" kern="0" dirty="0"/>
+          </a:p>
+          <a:p>
+            <a:endParaRPr lang="en-US" altLang="ko-KR" b="0" i="0" kern="0" dirty="0"/>
+          </a:p>
+          <a:p>
+            <a:endParaRPr lang="ko-KR" altLang="en-US" b="0" i="0" kern="0" dirty="0"/>
+          </a:p>
+          <a:p>
+            <a:endParaRPr lang="en-US" altLang="ko-KR" b="0" i="0" kern="0" dirty="0"/>
+          </a:p>
+          <a:p>
+            <a:endParaRPr lang="en-US" altLang="ko-KR" b="0" i="0" kern="0" dirty="0"/>
+          </a:p>
+          <a:p>
+            <a:endParaRPr lang="en-US" altLang="ko-KR" b="0" i="0" kern="0" dirty="0"/>
+          </a:p>
+        </p:txBody>
+      </p:sp>
+    </p:spTree>
+    <p:extLst>
+      <p:ext uri="{BB962C8B-B14F-4D97-AF65-F5344CB8AC3E}">
+        <p14:creationId xmlns:p14="http://schemas.microsoft.com/office/powerpoint/2010/main" val="1122964088"/>
+      </p:ext>
+    </p:extLst>
+  </p:cSld>
+  <p:clrMapOvr>
+    <a:masterClrMapping/>
+  </p:clrMapOvr>
+</p:sld>
+</file>
+
+<file path=ppt/slides/slide32.xml><?xml version="1.0" encoding="utf-8"?>
+<p:sld xmlns:a="http://schemas.openxmlformats.org/drawingml/2006/main" xmlns:r="http://schemas.openxmlformats.org/officeDocument/2006/relationships" xmlns:p="http://schemas.openxmlformats.org/presentationml/2006/main">
+  <p:cSld>
+    <p:spTree>
+      <p:nvGrpSpPr>
+        <p:cNvPr id="1" name="">
+          <a:extLst>
+            <a:ext uri="{FF2B5EF4-FFF2-40B4-BE49-F238E27FC236}">
               <a16:creationId xmlns:a16="http://schemas.microsoft.com/office/drawing/2014/main" id="{3E9EC280-923D-2F7A-5DBF-FC46CF99ECA8}"/>
             </a:ext>
           </a:extLst>
@@ -12127,7 +12449,7 @@
 </p:sld>
 </file>
 
-<file path=ppt/slides/slide32.xml><?xml version="1.0" encoding="utf-8"?>
+<file path=ppt/slides/slide33.xml><?xml version="1.0" encoding="utf-8"?>
 <p:sld xmlns:a="http://schemas.openxmlformats.org/drawingml/2006/main" xmlns:r="http://schemas.openxmlformats.org/officeDocument/2006/relationships" xmlns:p="http://schemas.openxmlformats.org/presentationml/2006/main">
   <p:cSld>
     <p:spTree>
@@ -12494,7 +12816,7 @@
 </p:sld>
 </file>
 
-<file path=ppt/slides/slide33.xml><?xml version="1.0" encoding="utf-8"?>
+<file path=ppt/slides/slide34.xml><?xml version="1.0" encoding="utf-8"?>
 <p:sld xmlns:a="http://schemas.openxmlformats.org/drawingml/2006/main" xmlns:r="http://schemas.openxmlformats.org/officeDocument/2006/relationships" xmlns:p="http://schemas.openxmlformats.org/presentationml/2006/main">
   <p:cSld>
     <p:spTree>
@@ -12867,7 +13189,7 @@
 </p:sld>
 </file>
 
-<file path=ppt/slides/slide34.xml><?xml version="1.0" encoding="utf-8"?>
+<file path=ppt/slides/slide35.xml><?xml version="1.0" encoding="utf-8"?>
 <p:sld xmlns:a="http://schemas.openxmlformats.org/drawingml/2006/main" xmlns:r="http://schemas.openxmlformats.org/officeDocument/2006/relationships" xmlns:p="http://schemas.openxmlformats.org/presentationml/2006/main">
   <p:cSld>
     <p:spTree>
@@ -13208,7 +13530,7 @@
 </p:sld>
 </file>
 
-<file path=ppt/slides/slide35.xml><?xml version="1.0" encoding="utf-8"?>
+<file path=ppt/slides/slide36.xml><?xml version="1.0" encoding="utf-8"?>
 <p:sld xmlns:a="http://schemas.openxmlformats.org/drawingml/2006/main" xmlns:r="http://schemas.openxmlformats.org/officeDocument/2006/relationships" xmlns:p="http://schemas.openxmlformats.org/presentationml/2006/main">
   <p:cSld>
     <p:spTree>
@@ -13559,7 +13881,7 @@
 </p:sld>
 </file>
 
-<file path=ppt/slides/slide36.xml><?xml version="1.0" encoding="utf-8"?>
+<file path=ppt/slides/slide37.xml><?xml version="1.0" encoding="utf-8"?>
 <p:sld xmlns:a="http://schemas.openxmlformats.org/drawingml/2006/main" xmlns:r="http://schemas.openxmlformats.org/officeDocument/2006/relationships" xmlns:p="http://schemas.openxmlformats.org/presentationml/2006/main">
   <p:cSld>
     <p:spTree>
@@ -13913,7 +14235,7 @@
 </p:sld>
 </file>
 
-<file path=ppt/slides/slide37.xml><?xml version="1.0" encoding="utf-8"?>
+<file path=ppt/slides/slide38.xml><?xml version="1.0" encoding="utf-8"?>
 <p:sld xmlns:a="http://schemas.openxmlformats.org/drawingml/2006/main" xmlns:r="http://schemas.openxmlformats.org/officeDocument/2006/relationships" xmlns:p="http://schemas.openxmlformats.org/presentationml/2006/main">
   <p:cSld>
     <p:spTree>
@@ -14236,7 +14558,7 @@
 </p:sld>
 </file>
 
-<file path=ppt/slides/slide38.xml><?xml version="1.0" encoding="utf-8"?>
+<file path=ppt/slides/slide39.xml><?xml version="1.0" encoding="utf-8"?>
 <p:sld xmlns:a="http://schemas.openxmlformats.org/drawingml/2006/main" xmlns:r="http://schemas.openxmlformats.org/officeDocument/2006/relationships" xmlns:p="http://schemas.openxmlformats.org/presentationml/2006/main">
   <p:cSld>
     <p:spTree>
@@ -14592,353 +14914,6 @@
     <p:extLst>
       <p:ext uri="{BB962C8B-B14F-4D97-AF65-F5344CB8AC3E}">
         <p14:creationId xmlns:p14="http://schemas.microsoft.com/office/powerpoint/2010/main" val="4231186703"/>
-      </p:ext>
-    </p:extLst>
-  </p:cSld>
-  <p:clrMapOvr>
-    <a:masterClrMapping/>
-  </p:clrMapOvr>
-</p:sld>
-</file>
-
-<file path=ppt/slides/slide39.xml><?xml version="1.0" encoding="utf-8"?>
-<p:sld xmlns:a="http://schemas.openxmlformats.org/drawingml/2006/main" xmlns:r="http://schemas.openxmlformats.org/officeDocument/2006/relationships" xmlns:p="http://schemas.openxmlformats.org/presentationml/2006/main">
-  <p:cSld>
-    <p:spTree>
-      <p:nvGrpSpPr>
-        <p:cNvPr id="1" name="">
-          <a:extLst>
-            <a:ext uri="{FF2B5EF4-FFF2-40B4-BE49-F238E27FC236}">
-              <a16:creationId xmlns:a16="http://schemas.microsoft.com/office/drawing/2014/main" id="{B7E993E6-E595-4570-3784-66E1ECE71EE9}"/>
-            </a:ext>
-          </a:extLst>
-        </p:cNvPr>
-        <p:cNvGrpSpPr/>
-        <p:nvPr/>
-      </p:nvGrpSpPr>
-      <p:grpSpPr>
-        <a:xfrm>
-          <a:off x="0" y="0"/>
-          <a:ext cx="0" cy="0"/>
-          <a:chOff x="0" y="0"/>
-          <a:chExt cx="0" cy="0"/>
-        </a:xfrm>
-      </p:grpSpPr>
-      <p:sp>
-        <p:nvSpPr>
-          <p:cNvPr id="2" name="제목 1">
-            <a:extLst>
-              <a:ext uri="{FF2B5EF4-FFF2-40B4-BE49-F238E27FC236}">
-                <a16:creationId xmlns:a16="http://schemas.microsoft.com/office/drawing/2014/main" id="{F7C3BAE9-B688-30CC-6FC1-7232FCCF37D6}"/>
-              </a:ext>
-            </a:extLst>
-          </p:cNvPr>
-          <p:cNvSpPr>
-            <a:spLocks noGrp="1"/>
-          </p:cNvSpPr>
-          <p:nvPr>
-            <p:ph type="title"/>
-          </p:nvPr>
-        </p:nvSpPr>
-        <p:spPr/>
-        <p:txBody>
-          <a:bodyPr/>
-          <a:lstStyle/>
-          <a:p>
-            <a:r>
-              <a:rPr lang="en-US" altLang="ko-KR" dirty="0"/>
-              <a:t>SD </a:t>
-            </a:r>
-            <a:r>
-              <a:rPr lang="ko-KR" altLang="en-US" dirty="0"/>
-              <a:t>메모리 개요</a:t>
-            </a:r>
-          </a:p>
-        </p:txBody>
-      </p:sp>
-      <p:sp>
-        <p:nvSpPr>
-          <p:cNvPr id="3" name="Content Placeholder 2">
-            <a:extLst>
-              <a:ext uri="{FF2B5EF4-FFF2-40B4-BE49-F238E27FC236}">
-                <a16:creationId xmlns:a16="http://schemas.microsoft.com/office/drawing/2014/main" id="{0DDF9077-F0E4-3BF7-5DC9-EEA358507DB6}"/>
-              </a:ext>
-            </a:extLst>
-          </p:cNvPr>
-          <p:cNvSpPr txBox="1">
-            <a:spLocks/>
-          </p:cNvSpPr>
-          <p:nvPr/>
-        </p:nvSpPr>
-        <p:spPr bwMode="auto">
-          <a:xfrm>
-            <a:off x="628650" y="692696"/>
-            <a:ext cx="7886700" cy="5544616"/>
-          </a:xfrm>
-          <a:prstGeom prst="rect">
-            <a:avLst/>
-          </a:prstGeom>
-          <a:noFill/>
-          <a:ln w="9525">
-            <a:noFill/>
-            <a:miter lim="800000"/>
-            <a:headEnd/>
-            <a:tailEnd/>
-          </a:ln>
-          <a:effectLst/>
-        </p:spPr>
-        <p:txBody>
-          <a:bodyPr vert="horz" wrap="square" lIns="91440" tIns="45720" rIns="91440" bIns="45720" numCol="1" anchor="t" anchorCtr="0" compatLnSpc="1">
-            <a:prstTxWarp prst="textNoShape">
-              <a:avLst/>
-            </a:prstTxWarp>
-            <a:normAutofit/>
-          </a:bodyPr>
-          <a:lstStyle>
-            <a:lvl1pPr marL="342900" indent="-342900" algn="l" rtl="0" fontAlgn="base" latinLnBrk="1">
-              <a:spcBef>
-                <a:spcPct val="20000"/>
-              </a:spcBef>
-              <a:spcAft>
-                <a:spcPct val="0"/>
-              </a:spcAft>
-              <a:buClr>
-                <a:schemeClr val="tx1"/>
-              </a:buClr>
-              <a:buChar char="•"/>
-              <a:defRPr kumimoji="1" sz="2000">
-                <a:solidFill>
-                  <a:schemeClr val="tx1"/>
-                </a:solidFill>
-                <a:latin typeface="Verdana" pitchFamily="34" charset="0"/>
-                <a:ea typeface="+mn-ea"/>
-                <a:cs typeface="+mn-cs"/>
-              </a:defRPr>
-            </a:lvl1pPr>
-            <a:lvl2pPr marL="742950" indent="-285750" algn="l" rtl="0" fontAlgn="base" latinLnBrk="1">
-              <a:spcBef>
-                <a:spcPct val="20000"/>
-              </a:spcBef>
-              <a:spcAft>
-                <a:spcPct val="0"/>
-              </a:spcAft>
-              <a:buClr>
-                <a:schemeClr val="tx1"/>
-              </a:buClr>
-              <a:buFont typeface="Wingdings" pitchFamily="2" charset="2"/>
-              <a:buChar char="Ø"/>
-              <a:defRPr kumimoji="1">
-                <a:solidFill>
-                  <a:schemeClr val="tx1"/>
-                </a:solidFill>
-                <a:latin typeface="Verdana" pitchFamily="34" charset="0"/>
-                <a:ea typeface="+mn-ea"/>
-              </a:defRPr>
-            </a:lvl2pPr>
-            <a:lvl3pPr marL="1143000" indent="-228600" algn="l" rtl="0" fontAlgn="base" latinLnBrk="1">
-              <a:spcBef>
-                <a:spcPct val="20000"/>
-              </a:spcBef>
-              <a:spcAft>
-                <a:spcPct val="0"/>
-              </a:spcAft>
-              <a:buClr>
-                <a:schemeClr val="tx1"/>
-              </a:buClr>
-              <a:buFont typeface="Wingdings" pitchFamily="2" charset="2"/>
-              <a:buChar char="§"/>
-              <a:defRPr kumimoji="1" sz="1600">
-                <a:solidFill>
-                  <a:schemeClr val="tx1"/>
-                </a:solidFill>
-                <a:latin typeface="Verdana" pitchFamily="34" charset="0"/>
-                <a:ea typeface="+mn-ea"/>
-              </a:defRPr>
-            </a:lvl3pPr>
-            <a:lvl4pPr marL="1600200" indent="-228600" algn="l" rtl="0" fontAlgn="base" latinLnBrk="1">
-              <a:spcBef>
-                <a:spcPct val="20000"/>
-              </a:spcBef>
-              <a:spcAft>
-                <a:spcPct val="0"/>
-              </a:spcAft>
-              <a:buClr>
-                <a:schemeClr val="bg2"/>
-              </a:buClr>
-              <a:buFont typeface="Wingdings 2" pitchFamily="18" charset="2"/>
-              <a:buChar char=""/>
-              <a:defRPr kumimoji="1" sz="2000">
-                <a:solidFill>
-                  <a:schemeClr val="tx1"/>
-                </a:solidFill>
-                <a:latin typeface="Verdana" pitchFamily="34" charset="0"/>
-                <a:ea typeface="+mn-ea"/>
-              </a:defRPr>
-            </a:lvl4pPr>
-            <a:lvl5pPr marL="2057400" indent="-228600" algn="l" rtl="0" fontAlgn="base" latinLnBrk="1">
-              <a:spcBef>
-                <a:spcPct val="20000"/>
-              </a:spcBef>
-              <a:spcAft>
-                <a:spcPct val="0"/>
-              </a:spcAft>
-              <a:buClr>
-                <a:schemeClr val="bg2"/>
-              </a:buClr>
-              <a:buFont typeface="Arial" charset="0"/>
-              <a:buChar char="»"/>
-              <a:defRPr kumimoji="1" sz="1600">
-                <a:solidFill>
-                  <a:schemeClr val="tx1"/>
-                </a:solidFill>
-                <a:latin typeface="Verdana" pitchFamily="34" charset="0"/>
-                <a:ea typeface="+mn-ea"/>
-              </a:defRPr>
-            </a:lvl5pPr>
-            <a:lvl6pPr marL="2514600" indent="-228600" algn="l" rtl="0" fontAlgn="base" latinLnBrk="1">
-              <a:spcBef>
-                <a:spcPct val="20000"/>
-              </a:spcBef>
-              <a:spcAft>
-                <a:spcPct val="0"/>
-              </a:spcAft>
-              <a:buClr>
-                <a:schemeClr val="bg2"/>
-              </a:buClr>
-              <a:buFont typeface="Arial" charset="0"/>
-              <a:buChar char="»"/>
-              <a:defRPr kumimoji="1" sz="1600">
-                <a:solidFill>
-                  <a:schemeClr val="tx1"/>
-                </a:solidFill>
-                <a:latin typeface="Arial" charset="0"/>
-                <a:ea typeface="+mn-ea"/>
-              </a:defRPr>
-            </a:lvl6pPr>
-            <a:lvl7pPr marL="2971800" indent="-228600" algn="l" rtl="0" fontAlgn="base" latinLnBrk="1">
-              <a:spcBef>
-                <a:spcPct val="20000"/>
-              </a:spcBef>
-              <a:spcAft>
-                <a:spcPct val="0"/>
-              </a:spcAft>
-              <a:buClr>
-                <a:schemeClr val="bg2"/>
-              </a:buClr>
-              <a:buFont typeface="Arial" charset="0"/>
-              <a:buChar char="»"/>
-              <a:defRPr kumimoji="1" sz="1600">
-                <a:solidFill>
-                  <a:schemeClr val="tx1"/>
-                </a:solidFill>
-                <a:latin typeface="Arial" charset="0"/>
-                <a:ea typeface="+mn-ea"/>
-              </a:defRPr>
-            </a:lvl7pPr>
-            <a:lvl8pPr marL="3429000" indent="-228600" algn="l" rtl="0" fontAlgn="base" latinLnBrk="1">
-              <a:spcBef>
-                <a:spcPct val="20000"/>
-              </a:spcBef>
-              <a:spcAft>
-                <a:spcPct val="0"/>
-              </a:spcAft>
-              <a:buClr>
-                <a:schemeClr val="bg2"/>
-              </a:buClr>
-              <a:buFont typeface="Arial" charset="0"/>
-              <a:buChar char="»"/>
-              <a:defRPr kumimoji="1" sz="1600">
-                <a:solidFill>
-                  <a:schemeClr val="tx1"/>
-                </a:solidFill>
-                <a:latin typeface="Arial" charset="0"/>
-                <a:ea typeface="+mn-ea"/>
-              </a:defRPr>
-            </a:lvl8pPr>
-            <a:lvl9pPr marL="3886200" indent="-228600" algn="l" rtl="0" fontAlgn="base" latinLnBrk="1">
-              <a:spcBef>
-                <a:spcPct val="20000"/>
-              </a:spcBef>
-              <a:spcAft>
-                <a:spcPct val="0"/>
-              </a:spcAft>
-              <a:buClr>
-                <a:schemeClr val="bg2"/>
-              </a:buClr>
-              <a:buFont typeface="Arial" charset="0"/>
-              <a:buChar char="»"/>
-              <a:defRPr kumimoji="1" sz="1600">
-                <a:solidFill>
-                  <a:schemeClr val="tx1"/>
-                </a:solidFill>
-                <a:latin typeface="Arial" charset="0"/>
-                <a:ea typeface="+mn-ea"/>
-              </a:defRPr>
-            </a:lvl9pPr>
-          </a:lstStyle>
-          <a:p>
-            <a:r>
-              <a:rPr lang="en-US" altLang="ko-KR" b="0" i="0" kern="0"/>
-              <a:t>Secure Digital Memory Card</a:t>
-            </a:r>
-          </a:p>
-          <a:p>
-            <a:r>
-              <a:rPr lang="ko-KR" altLang="en-US" b="0" i="0" kern="0"/>
-              <a:t>플래시 기반 비휘발성 저장장치</a:t>
-            </a:r>
-          </a:p>
-          <a:p>
-            <a:r>
-              <a:rPr lang="ko-KR" altLang="en-US" b="0" i="0" kern="0"/>
-              <a:t>소형</a:t>
-            </a:r>
-            <a:r>
-              <a:rPr lang="en-US" altLang="ko-KR" b="0" i="0" kern="0"/>
-              <a:t>·</a:t>
-            </a:r>
-            <a:r>
-              <a:rPr lang="ko-KR" altLang="en-US" b="0" i="0" kern="0"/>
-              <a:t>저전력</a:t>
-            </a:r>
-            <a:r>
-              <a:rPr lang="en-US" altLang="ko-KR" b="0" i="0" kern="0"/>
-              <a:t>·</a:t>
-            </a:r>
-            <a:r>
-              <a:rPr lang="ko-KR" altLang="en-US" b="0" i="0" kern="0"/>
-              <a:t>대용량 저장 매체</a:t>
-            </a:r>
-          </a:p>
-          <a:p>
-            <a:r>
-              <a:rPr lang="ko-KR" altLang="en-US" b="0" i="0" kern="0"/>
-              <a:t>카메라</a:t>
-            </a:r>
-            <a:r>
-              <a:rPr lang="en-US" altLang="ko-KR" b="0" i="0" kern="0"/>
-              <a:t>, </a:t>
-            </a:r>
-            <a:r>
-              <a:rPr lang="ko-KR" altLang="en-US" b="0" i="0" kern="0"/>
-              <a:t>임베디드</a:t>
-            </a:r>
-            <a:r>
-              <a:rPr lang="en-US" altLang="ko-KR" b="0" i="0" kern="0"/>
-              <a:t>, </a:t>
-            </a:r>
-            <a:r>
-              <a:rPr lang="ko-KR" altLang="en-US" b="0" i="0" kern="0"/>
-              <a:t>모바일 기기에서 사용</a:t>
-            </a:r>
-            <a:endParaRPr lang="ko-KR" altLang="en-US" b="0" i="0" kern="0" dirty="0"/>
-          </a:p>
-        </p:txBody>
-      </p:sp>
-    </p:spTree>
-    <p:extLst>
-      <p:ext uri="{BB962C8B-B14F-4D97-AF65-F5344CB8AC3E}">
-        <p14:creationId xmlns:p14="http://schemas.microsoft.com/office/powerpoint/2010/main" val="99891943"/>
       </p:ext>
     </p:extLst>
   </p:cSld>
@@ -15280,6 +15255,653 @@
         <p:cNvPr id="1" name="">
           <a:extLst>
             <a:ext uri="{FF2B5EF4-FFF2-40B4-BE49-F238E27FC236}">
+              <a16:creationId xmlns:a16="http://schemas.microsoft.com/office/drawing/2014/main" id="{3F8E1238-2E11-6B5A-E908-1253C85619B3}"/>
+            </a:ext>
+          </a:extLst>
+        </p:cNvPr>
+        <p:cNvGrpSpPr/>
+        <p:nvPr/>
+      </p:nvGrpSpPr>
+      <p:grpSpPr>
+        <a:xfrm>
+          <a:off x="0" y="0"/>
+          <a:ext cx="0" cy="0"/>
+          <a:chOff x="0" y="0"/>
+          <a:chExt cx="0" cy="0"/>
+        </a:xfrm>
+      </p:grpSpPr>
+      <p:sp>
+        <p:nvSpPr>
+          <p:cNvPr id="2" name="제목 1">
+            <a:extLst>
+              <a:ext uri="{FF2B5EF4-FFF2-40B4-BE49-F238E27FC236}">
+                <a16:creationId xmlns:a16="http://schemas.microsoft.com/office/drawing/2014/main" id="{8CA96B14-169C-B90C-622E-FE2DE080F476}"/>
+              </a:ext>
+            </a:extLst>
+          </p:cNvPr>
+          <p:cNvSpPr>
+            <a:spLocks noGrp="1"/>
+          </p:cNvSpPr>
+          <p:nvPr>
+            <p:ph type="title"/>
+          </p:nvPr>
+        </p:nvSpPr>
+        <p:spPr/>
+        <p:txBody>
+          <a:bodyPr/>
+          <a:lstStyle/>
+          <a:p>
+            <a:r>
+              <a:rPr lang="en-US" altLang="ko-KR" dirty="0"/>
+              <a:t>Ethernet </a:t>
+            </a:r>
+            <a:r>
+              <a:rPr lang="ko-KR" altLang="en-US" dirty="0"/>
+              <a:t>패킷 분석</a:t>
+            </a:r>
+          </a:p>
+        </p:txBody>
+      </p:sp>
+      <p:sp>
+        <p:nvSpPr>
+          <p:cNvPr id="3" name="Content Placeholder 2">
+            <a:extLst>
+              <a:ext uri="{FF2B5EF4-FFF2-40B4-BE49-F238E27FC236}">
+                <a16:creationId xmlns:a16="http://schemas.microsoft.com/office/drawing/2014/main" id="{D099D68D-4112-24D3-BB50-7274D580E204}"/>
+              </a:ext>
+            </a:extLst>
+          </p:cNvPr>
+          <p:cNvSpPr txBox="1">
+            <a:spLocks/>
+          </p:cNvSpPr>
+          <p:nvPr/>
+        </p:nvSpPr>
+        <p:spPr bwMode="auto">
+          <a:xfrm>
+            <a:off x="628650" y="692696"/>
+            <a:ext cx="7886700" cy="5544616"/>
+          </a:xfrm>
+          <a:prstGeom prst="rect">
+            <a:avLst/>
+          </a:prstGeom>
+          <a:noFill/>
+          <a:ln w="9525">
+            <a:noFill/>
+            <a:miter lim="800000"/>
+            <a:headEnd/>
+            <a:tailEnd/>
+          </a:ln>
+          <a:effectLst/>
+        </p:spPr>
+        <p:txBody>
+          <a:bodyPr vert="horz" wrap="square" lIns="91440" tIns="45720" rIns="91440" bIns="45720" numCol="1" anchor="t" anchorCtr="0" compatLnSpc="1">
+            <a:prstTxWarp prst="textNoShape">
+              <a:avLst/>
+            </a:prstTxWarp>
+            <a:normAutofit/>
+          </a:bodyPr>
+          <a:lstStyle>
+            <a:lvl1pPr marL="342900" indent="-342900" algn="l" rtl="0" fontAlgn="base" latinLnBrk="1">
+              <a:spcBef>
+                <a:spcPct val="20000"/>
+              </a:spcBef>
+              <a:spcAft>
+                <a:spcPct val="0"/>
+              </a:spcAft>
+              <a:buClr>
+                <a:schemeClr val="tx1"/>
+              </a:buClr>
+              <a:buChar char="•"/>
+              <a:defRPr kumimoji="1" sz="2000">
+                <a:solidFill>
+                  <a:schemeClr val="tx1"/>
+                </a:solidFill>
+                <a:latin typeface="Verdana" pitchFamily="34" charset="0"/>
+                <a:ea typeface="+mn-ea"/>
+                <a:cs typeface="+mn-cs"/>
+              </a:defRPr>
+            </a:lvl1pPr>
+            <a:lvl2pPr marL="742950" indent="-285750" algn="l" rtl="0" fontAlgn="base" latinLnBrk="1">
+              <a:spcBef>
+                <a:spcPct val="20000"/>
+              </a:spcBef>
+              <a:spcAft>
+                <a:spcPct val="0"/>
+              </a:spcAft>
+              <a:buClr>
+                <a:schemeClr val="tx1"/>
+              </a:buClr>
+              <a:buFont typeface="Wingdings" pitchFamily="2" charset="2"/>
+              <a:buChar char="Ø"/>
+              <a:defRPr kumimoji="1">
+                <a:solidFill>
+                  <a:schemeClr val="tx1"/>
+                </a:solidFill>
+                <a:latin typeface="Verdana" pitchFamily="34" charset="0"/>
+                <a:ea typeface="+mn-ea"/>
+              </a:defRPr>
+            </a:lvl2pPr>
+            <a:lvl3pPr marL="1143000" indent="-228600" algn="l" rtl="0" fontAlgn="base" latinLnBrk="1">
+              <a:spcBef>
+                <a:spcPct val="20000"/>
+              </a:spcBef>
+              <a:spcAft>
+                <a:spcPct val="0"/>
+              </a:spcAft>
+              <a:buClr>
+                <a:schemeClr val="tx1"/>
+              </a:buClr>
+              <a:buFont typeface="Wingdings" pitchFamily="2" charset="2"/>
+              <a:buChar char="§"/>
+              <a:defRPr kumimoji="1" sz="1600">
+                <a:solidFill>
+                  <a:schemeClr val="tx1"/>
+                </a:solidFill>
+                <a:latin typeface="Verdana" pitchFamily="34" charset="0"/>
+                <a:ea typeface="+mn-ea"/>
+              </a:defRPr>
+            </a:lvl3pPr>
+            <a:lvl4pPr marL="1600200" indent="-228600" algn="l" rtl="0" fontAlgn="base" latinLnBrk="1">
+              <a:spcBef>
+                <a:spcPct val="20000"/>
+              </a:spcBef>
+              <a:spcAft>
+                <a:spcPct val="0"/>
+              </a:spcAft>
+              <a:buClr>
+                <a:schemeClr val="bg2"/>
+              </a:buClr>
+              <a:buFont typeface="Wingdings 2" pitchFamily="18" charset="2"/>
+              <a:buChar char=""/>
+              <a:defRPr kumimoji="1" sz="2000">
+                <a:solidFill>
+                  <a:schemeClr val="tx1"/>
+                </a:solidFill>
+                <a:latin typeface="Verdana" pitchFamily="34" charset="0"/>
+                <a:ea typeface="+mn-ea"/>
+              </a:defRPr>
+            </a:lvl4pPr>
+            <a:lvl5pPr marL="2057400" indent="-228600" algn="l" rtl="0" fontAlgn="base" latinLnBrk="1">
+              <a:spcBef>
+                <a:spcPct val="20000"/>
+              </a:spcBef>
+              <a:spcAft>
+                <a:spcPct val="0"/>
+              </a:spcAft>
+              <a:buClr>
+                <a:schemeClr val="bg2"/>
+              </a:buClr>
+              <a:buFont typeface="Arial" charset="0"/>
+              <a:buChar char="»"/>
+              <a:defRPr kumimoji="1" sz="1600">
+                <a:solidFill>
+                  <a:schemeClr val="tx1"/>
+                </a:solidFill>
+                <a:latin typeface="Verdana" pitchFamily="34" charset="0"/>
+                <a:ea typeface="+mn-ea"/>
+              </a:defRPr>
+            </a:lvl5pPr>
+            <a:lvl6pPr marL="2514600" indent="-228600" algn="l" rtl="0" fontAlgn="base" latinLnBrk="1">
+              <a:spcBef>
+                <a:spcPct val="20000"/>
+              </a:spcBef>
+              <a:spcAft>
+                <a:spcPct val="0"/>
+              </a:spcAft>
+              <a:buClr>
+                <a:schemeClr val="bg2"/>
+              </a:buClr>
+              <a:buFont typeface="Arial" charset="0"/>
+              <a:buChar char="»"/>
+              <a:defRPr kumimoji="1" sz="1600">
+                <a:solidFill>
+                  <a:schemeClr val="tx1"/>
+                </a:solidFill>
+                <a:latin typeface="Arial" charset="0"/>
+                <a:ea typeface="+mn-ea"/>
+              </a:defRPr>
+            </a:lvl6pPr>
+            <a:lvl7pPr marL="2971800" indent="-228600" algn="l" rtl="0" fontAlgn="base" latinLnBrk="1">
+              <a:spcBef>
+                <a:spcPct val="20000"/>
+              </a:spcBef>
+              <a:spcAft>
+                <a:spcPct val="0"/>
+              </a:spcAft>
+              <a:buClr>
+                <a:schemeClr val="bg2"/>
+              </a:buClr>
+              <a:buFont typeface="Arial" charset="0"/>
+              <a:buChar char="»"/>
+              <a:defRPr kumimoji="1" sz="1600">
+                <a:solidFill>
+                  <a:schemeClr val="tx1"/>
+                </a:solidFill>
+                <a:latin typeface="Arial" charset="0"/>
+                <a:ea typeface="+mn-ea"/>
+              </a:defRPr>
+            </a:lvl7pPr>
+            <a:lvl8pPr marL="3429000" indent="-228600" algn="l" rtl="0" fontAlgn="base" latinLnBrk="1">
+              <a:spcBef>
+                <a:spcPct val="20000"/>
+              </a:spcBef>
+              <a:spcAft>
+                <a:spcPct val="0"/>
+              </a:spcAft>
+              <a:buClr>
+                <a:schemeClr val="bg2"/>
+              </a:buClr>
+              <a:buFont typeface="Arial" charset="0"/>
+              <a:buChar char="»"/>
+              <a:defRPr kumimoji="1" sz="1600">
+                <a:solidFill>
+                  <a:schemeClr val="tx1"/>
+                </a:solidFill>
+                <a:latin typeface="Arial" charset="0"/>
+                <a:ea typeface="+mn-ea"/>
+              </a:defRPr>
+            </a:lvl8pPr>
+            <a:lvl9pPr marL="3886200" indent="-228600" algn="l" rtl="0" fontAlgn="base" latinLnBrk="1">
+              <a:spcBef>
+                <a:spcPct val="20000"/>
+              </a:spcBef>
+              <a:spcAft>
+                <a:spcPct val="0"/>
+              </a:spcAft>
+              <a:buClr>
+                <a:schemeClr val="bg2"/>
+              </a:buClr>
+              <a:buFont typeface="Arial" charset="0"/>
+              <a:buChar char="»"/>
+              <a:defRPr kumimoji="1" sz="1600">
+                <a:solidFill>
+                  <a:schemeClr val="tx1"/>
+                </a:solidFill>
+                <a:latin typeface="Arial" charset="0"/>
+                <a:ea typeface="+mn-ea"/>
+              </a:defRPr>
+            </a:lvl9pPr>
+          </a:lstStyle>
+          <a:p>
+            <a:r>
+              <a:rPr lang="en-US" altLang="ko-KR" b="0" i="0" kern="0"/>
+              <a:t>WireShark</a:t>
+            </a:r>
+            <a:endParaRPr lang="ko-KR" altLang="en-US" b="0" i="0" kern="0" dirty="0"/>
+          </a:p>
+          <a:p>
+            <a:endParaRPr lang="en-US" altLang="ko-KR" b="0" i="0" kern="0" dirty="0"/>
+          </a:p>
+        </p:txBody>
+      </p:sp>
+    </p:spTree>
+    <p:extLst>
+      <p:ext uri="{BB962C8B-B14F-4D97-AF65-F5344CB8AC3E}">
+        <p14:creationId xmlns:p14="http://schemas.microsoft.com/office/powerpoint/2010/main" val="2751357243"/>
+      </p:ext>
+    </p:extLst>
+  </p:cSld>
+  <p:clrMapOvr>
+    <a:masterClrMapping/>
+  </p:clrMapOvr>
+</p:sld>
+</file>
+
+<file path=ppt/slides/slide41.xml><?xml version="1.0" encoding="utf-8"?>
+<p:sld xmlns:a="http://schemas.openxmlformats.org/drawingml/2006/main" xmlns:r="http://schemas.openxmlformats.org/officeDocument/2006/relationships" xmlns:p="http://schemas.openxmlformats.org/presentationml/2006/main">
+  <p:cSld>
+    <p:spTree>
+      <p:nvGrpSpPr>
+        <p:cNvPr id="1" name="">
+          <a:extLst>
+            <a:ext uri="{FF2B5EF4-FFF2-40B4-BE49-F238E27FC236}">
+              <a16:creationId xmlns:a16="http://schemas.microsoft.com/office/drawing/2014/main" id="{B7E993E6-E595-4570-3784-66E1ECE71EE9}"/>
+            </a:ext>
+          </a:extLst>
+        </p:cNvPr>
+        <p:cNvGrpSpPr/>
+        <p:nvPr/>
+      </p:nvGrpSpPr>
+      <p:grpSpPr>
+        <a:xfrm>
+          <a:off x="0" y="0"/>
+          <a:ext cx="0" cy="0"/>
+          <a:chOff x="0" y="0"/>
+          <a:chExt cx="0" cy="0"/>
+        </a:xfrm>
+      </p:grpSpPr>
+      <p:sp>
+        <p:nvSpPr>
+          <p:cNvPr id="2" name="제목 1">
+            <a:extLst>
+              <a:ext uri="{FF2B5EF4-FFF2-40B4-BE49-F238E27FC236}">
+                <a16:creationId xmlns:a16="http://schemas.microsoft.com/office/drawing/2014/main" id="{F7C3BAE9-B688-30CC-6FC1-7232FCCF37D6}"/>
+              </a:ext>
+            </a:extLst>
+          </p:cNvPr>
+          <p:cNvSpPr>
+            <a:spLocks noGrp="1"/>
+          </p:cNvSpPr>
+          <p:nvPr>
+            <p:ph type="title"/>
+          </p:nvPr>
+        </p:nvSpPr>
+        <p:spPr/>
+        <p:txBody>
+          <a:bodyPr/>
+          <a:lstStyle/>
+          <a:p>
+            <a:r>
+              <a:rPr lang="en-US" altLang="ko-KR" dirty="0"/>
+              <a:t>SD </a:t>
+            </a:r>
+            <a:r>
+              <a:rPr lang="ko-KR" altLang="en-US" dirty="0"/>
+              <a:t>메모리 개요</a:t>
+            </a:r>
+          </a:p>
+        </p:txBody>
+      </p:sp>
+      <p:sp>
+        <p:nvSpPr>
+          <p:cNvPr id="3" name="Content Placeholder 2">
+            <a:extLst>
+              <a:ext uri="{FF2B5EF4-FFF2-40B4-BE49-F238E27FC236}">
+                <a16:creationId xmlns:a16="http://schemas.microsoft.com/office/drawing/2014/main" id="{0DDF9077-F0E4-3BF7-5DC9-EEA358507DB6}"/>
+              </a:ext>
+            </a:extLst>
+          </p:cNvPr>
+          <p:cNvSpPr txBox="1">
+            <a:spLocks/>
+          </p:cNvSpPr>
+          <p:nvPr/>
+        </p:nvSpPr>
+        <p:spPr bwMode="auto">
+          <a:xfrm>
+            <a:off x="628650" y="692696"/>
+            <a:ext cx="7886700" cy="5544616"/>
+          </a:xfrm>
+          <a:prstGeom prst="rect">
+            <a:avLst/>
+          </a:prstGeom>
+          <a:noFill/>
+          <a:ln w="9525">
+            <a:noFill/>
+            <a:miter lim="800000"/>
+            <a:headEnd/>
+            <a:tailEnd/>
+          </a:ln>
+          <a:effectLst/>
+        </p:spPr>
+        <p:txBody>
+          <a:bodyPr vert="horz" wrap="square" lIns="91440" tIns="45720" rIns="91440" bIns="45720" numCol="1" anchor="t" anchorCtr="0" compatLnSpc="1">
+            <a:prstTxWarp prst="textNoShape">
+              <a:avLst/>
+            </a:prstTxWarp>
+            <a:normAutofit/>
+          </a:bodyPr>
+          <a:lstStyle>
+            <a:lvl1pPr marL="342900" indent="-342900" algn="l" rtl="0" fontAlgn="base" latinLnBrk="1">
+              <a:spcBef>
+                <a:spcPct val="20000"/>
+              </a:spcBef>
+              <a:spcAft>
+                <a:spcPct val="0"/>
+              </a:spcAft>
+              <a:buClr>
+                <a:schemeClr val="tx1"/>
+              </a:buClr>
+              <a:buChar char="•"/>
+              <a:defRPr kumimoji="1" sz="2000">
+                <a:solidFill>
+                  <a:schemeClr val="tx1"/>
+                </a:solidFill>
+                <a:latin typeface="Verdana" pitchFamily="34" charset="0"/>
+                <a:ea typeface="+mn-ea"/>
+                <a:cs typeface="+mn-cs"/>
+              </a:defRPr>
+            </a:lvl1pPr>
+            <a:lvl2pPr marL="742950" indent="-285750" algn="l" rtl="0" fontAlgn="base" latinLnBrk="1">
+              <a:spcBef>
+                <a:spcPct val="20000"/>
+              </a:spcBef>
+              <a:spcAft>
+                <a:spcPct val="0"/>
+              </a:spcAft>
+              <a:buClr>
+                <a:schemeClr val="tx1"/>
+              </a:buClr>
+              <a:buFont typeface="Wingdings" pitchFamily="2" charset="2"/>
+              <a:buChar char="Ø"/>
+              <a:defRPr kumimoji="1">
+                <a:solidFill>
+                  <a:schemeClr val="tx1"/>
+                </a:solidFill>
+                <a:latin typeface="Verdana" pitchFamily="34" charset="0"/>
+                <a:ea typeface="+mn-ea"/>
+              </a:defRPr>
+            </a:lvl2pPr>
+            <a:lvl3pPr marL="1143000" indent="-228600" algn="l" rtl="0" fontAlgn="base" latinLnBrk="1">
+              <a:spcBef>
+                <a:spcPct val="20000"/>
+              </a:spcBef>
+              <a:spcAft>
+                <a:spcPct val="0"/>
+              </a:spcAft>
+              <a:buClr>
+                <a:schemeClr val="tx1"/>
+              </a:buClr>
+              <a:buFont typeface="Wingdings" pitchFamily="2" charset="2"/>
+              <a:buChar char="§"/>
+              <a:defRPr kumimoji="1" sz="1600">
+                <a:solidFill>
+                  <a:schemeClr val="tx1"/>
+                </a:solidFill>
+                <a:latin typeface="Verdana" pitchFamily="34" charset="0"/>
+                <a:ea typeface="+mn-ea"/>
+              </a:defRPr>
+            </a:lvl3pPr>
+            <a:lvl4pPr marL="1600200" indent="-228600" algn="l" rtl="0" fontAlgn="base" latinLnBrk="1">
+              <a:spcBef>
+                <a:spcPct val="20000"/>
+              </a:spcBef>
+              <a:spcAft>
+                <a:spcPct val="0"/>
+              </a:spcAft>
+              <a:buClr>
+                <a:schemeClr val="bg2"/>
+              </a:buClr>
+              <a:buFont typeface="Wingdings 2" pitchFamily="18" charset="2"/>
+              <a:buChar char=""/>
+              <a:defRPr kumimoji="1" sz="2000">
+                <a:solidFill>
+                  <a:schemeClr val="tx1"/>
+                </a:solidFill>
+                <a:latin typeface="Verdana" pitchFamily="34" charset="0"/>
+                <a:ea typeface="+mn-ea"/>
+              </a:defRPr>
+            </a:lvl4pPr>
+            <a:lvl5pPr marL="2057400" indent="-228600" algn="l" rtl="0" fontAlgn="base" latinLnBrk="1">
+              <a:spcBef>
+                <a:spcPct val="20000"/>
+              </a:spcBef>
+              <a:spcAft>
+                <a:spcPct val="0"/>
+              </a:spcAft>
+              <a:buClr>
+                <a:schemeClr val="bg2"/>
+              </a:buClr>
+              <a:buFont typeface="Arial" charset="0"/>
+              <a:buChar char="»"/>
+              <a:defRPr kumimoji="1" sz="1600">
+                <a:solidFill>
+                  <a:schemeClr val="tx1"/>
+                </a:solidFill>
+                <a:latin typeface="Verdana" pitchFamily="34" charset="0"/>
+                <a:ea typeface="+mn-ea"/>
+              </a:defRPr>
+            </a:lvl5pPr>
+            <a:lvl6pPr marL="2514600" indent="-228600" algn="l" rtl="0" fontAlgn="base" latinLnBrk="1">
+              <a:spcBef>
+                <a:spcPct val="20000"/>
+              </a:spcBef>
+              <a:spcAft>
+                <a:spcPct val="0"/>
+              </a:spcAft>
+              <a:buClr>
+                <a:schemeClr val="bg2"/>
+              </a:buClr>
+              <a:buFont typeface="Arial" charset="0"/>
+              <a:buChar char="»"/>
+              <a:defRPr kumimoji="1" sz="1600">
+                <a:solidFill>
+                  <a:schemeClr val="tx1"/>
+                </a:solidFill>
+                <a:latin typeface="Arial" charset="0"/>
+                <a:ea typeface="+mn-ea"/>
+              </a:defRPr>
+            </a:lvl6pPr>
+            <a:lvl7pPr marL="2971800" indent="-228600" algn="l" rtl="0" fontAlgn="base" latinLnBrk="1">
+              <a:spcBef>
+                <a:spcPct val="20000"/>
+              </a:spcBef>
+              <a:spcAft>
+                <a:spcPct val="0"/>
+              </a:spcAft>
+              <a:buClr>
+                <a:schemeClr val="bg2"/>
+              </a:buClr>
+              <a:buFont typeface="Arial" charset="0"/>
+              <a:buChar char="»"/>
+              <a:defRPr kumimoji="1" sz="1600">
+                <a:solidFill>
+                  <a:schemeClr val="tx1"/>
+                </a:solidFill>
+                <a:latin typeface="Arial" charset="0"/>
+                <a:ea typeface="+mn-ea"/>
+              </a:defRPr>
+            </a:lvl7pPr>
+            <a:lvl8pPr marL="3429000" indent="-228600" algn="l" rtl="0" fontAlgn="base" latinLnBrk="1">
+              <a:spcBef>
+                <a:spcPct val="20000"/>
+              </a:spcBef>
+              <a:spcAft>
+                <a:spcPct val="0"/>
+              </a:spcAft>
+              <a:buClr>
+                <a:schemeClr val="bg2"/>
+              </a:buClr>
+              <a:buFont typeface="Arial" charset="0"/>
+              <a:buChar char="»"/>
+              <a:defRPr kumimoji="1" sz="1600">
+                <a:solidFill>
+                  <a:schemeClr val="tx1"/>
+                </a:solidFill>
+                <a:latin typeface="Arial" charset="0"/>
+                <a:ea typeface="+mn-ea"/>
+              </a:defRPr>
+            </a:lvl8pPr>
+            <a:lvl9pPr marL="3886200" indent="-228600" algn="l" rtl="0" fontAlgn="base" latinLnBrk="1">
+              <a:spcBef>
+                <a:spcPct val="20000"/>
+              </a:spcBef>
+              <a:spcAft>
+                <a:spcPct val="0"/>
+              </a:spcAft>
+              <a:buClr>
+                <a:schemeClr val="bg2"/>
+              </a:buClr>
+              <a:buFont typeface="Arial" charset="0"/>
+              <a:buChar char="»"/>
+              <a:defRPr kumimoji="1" sz="1600">
+                <a:solidFill>
+                  <a:schemeClr val="tx1"/>
+                </a:solidFill>
+                <a:latin typeface="Arial" charset="0"/>
+                <a:ea typeface="+mn-ea"/>
+              </a:defRPr>
+            </a:lvl9pPr>
+          </a:lstStyle>
+          <a:p>
+            <a:r>
+              <a:rPr lang="en-US" altLang="ko-KR" b="0" i="0" kern="0"/>
+              <a:t>Secure Digital Memory Card</a:t>
+            </a:r>
+          </a:p>
+          <a:p>
+            <a:r>
+              <a:rPr lang="ko-KR" altLang="en-US" b="0" i="0" kern="0"/>
+              <a:t>플래시 기반 비휘발성 저장장치</a:t>
+            </a:r>
+          </a:p>
+          <a:p>
+            <a:r>
+              <a:rPr lang="ko-KR" altLang="en-US" b="0" i="0" kern="0"/>
+              <a:t>소형</a:t>
+            </a:r>
+            <a:r>
+              <a:rPr lang="en-US" altLang="ko-KR" b="0" i="0" kern="0"/>
+              <a:t>·</a:t>
+            </a:r>
+            <a:r>
+              <a:rPr lang="ko-KR" altLang="en-US" b="0" i="0" kern="0"/>
+              <a:t>저전력</a:t>
+            </a:r>
+            <a:r>
+              <a:rPr lang="en-US" altLang="ko-KR" b="0" i="0" kern="0"/>
+              <a:t>·</a:t>
+            </a:r>
+            <a:r>
+              <a:rPr lang="ko-KR" altLang="en-US" b="0" i="0" kern="0"/>
+              <a:t>대용량 저장 매체</a:t>
+            </a:r>
+          </a:p>
+          <a:p>
+            <a:r>
+              <a:rPr lang="ko-KR" altLang="en-US" b="0" i="0" kern="0"/>
+              <a:t>카메라</a:t>
+            </a:r>
+            <a:r>
+              <a:rPr lang="en-US" altLang="ko-KR" b="0" i="0" kern="0"/>
+              <a:t>, </a:t>
+            </a:r>
+            <a:r>
+              <a:rPr lang="ko-KR" altLang="en-US" b="0" i="0" kern="0"/>
+              <a:t>임베디드</a:t>
+            </a:r>
+            <a:r>
+              <a:rPr lang="en-US" altLang="ko-KR" b="0" i="0" kern="0"/>
+              <a:t>, </a:t>
+            </a:r>
+            <a:r>
+              <a:rPr lang="ko-KR" altLang="en-US" b="0" i="0" kern="0"/>
+              <a:t>모바일 기기에서 사용</a:t>
+            </a:r>
+            <a:endParaRPr lang="ko-KR" altLang="en-US" b="0" i="0" kern="0" dirty="0"/>
+          </a:p>
+        </p:txBody>
+      </p:sp>
+    </p:spTree>
+    <p:extLst>
+      <p:ext uri="{BB962C8B-B14F-4D97-AF65-F5344CB8AC3E}">
+        <p14:creationId xmlns:p14="http://schemas.microsoft.com/office/powerpoint/2010/main" val="99891943"/>
+      </p:ext>
+    </p:extLst>
+  </p:cSld>
+  <p:clrMapOvr>
+    <a:masterClrMapping/>
+  </p:clrMapOvr>
+</p:sld>
+</file>
+
+<file path=ppt/slides/slide42.xml><?xml version="1.0" encoding="utf-8"?>
+<p:sld xmlns:a="http://schemas.openxmlformats.org/drawingml/2006/main" xmlns:r="http://schemas.openxmlformats.org/officeDocument/2006/relationships" xmlns:p="http://schemas.openxmlformats.org/presentationml/2006/main">
+  <p:cSld>
+    <p:spTree>
+      <p:nvGrpSpPr>
+        <p:cNvPr id="1" name="">
+          <a:extLst>
+            <a:ext uri="{FF2B5EF4-FFF2-40B4-BE49-F238E27FC236}">
               <a16:creationId xmlns:a16="http://schemas.microsoft.com/office/drawing/2014/main" id="{6D772E0B-0F2A-21BE-BD5C-0338DC6A8589}"/>
             </a:ext>
           </a:extLst>
@@ -15610,7 +16232,7 @@
 </p:sld>
 </file>
 
-<file path=ppt/slides/slide41.xml><?xml version="1.0" encoding="utf-8"?>
+<file path=ppt/slides/slide43.xml><?xml version="1.0" encoding="utf-8"?>
 <p:sld xmlns:a="http://schemas.openxmlformats.org/drawingml/2006/main" xmlns:r="http://schemas.openxmlformats.org/officeDocument/2006/relationships" xmlns:p="http://schemas.openxmlformats.org/presentationml/2006/main">
   <p:cSld>
     <p:spTree>
@@ -15995,7 +16617,7 @@
 </p:sld>
 </file>
 
-<file path=ppt/slides/slide42.xml><?xml version="1.0" encoding="utf-8"?>
+<file path=ppt/slides/slide44.xml><?xml version="1.0" encoding="utf-8"?>
 <p:sld xmlns:a="http://schemas.openxmlformats.org/drawingml/2006/main" xmlns:r="http://schemas.openxmlformats.org/officeDocument/2006/relationships" xmlns:p="http://schemas.openxmlformats.org/presentationml/2006/main">
   <p:cSld>
     <p:spTree>
@@ -16342,7 +16964,7 @@
 </p:sld>
 </file>
 
-<file path=ppt/slides/slide43.xml><?xml version="1.0" encoding="utf-8"?>
+<file path=ppt/slides/slide45.xml><?xml version="1.0" encoding="utf-8"?>
 <p:sld xmlns:a="http://schemas.openxmlformats.org/drawingml/2006/main" xmlns:r="http://schemas.openxmlformats.org/officeDocument/2006/relationships" xmlns:p="http://schemas.openxmlformats.org/presentationml/2006/main">
   <p:cSld>
     <p:spTree>
@@ -16676,7 +17298,7 @@
 </p:sld>
 </file>
 
-<file path=ppt/slides/slide44.xml><?xml version="1.0" encoding="utf-8"?>
+<file path=ppt/slides/slide46.xml><?xml version="1.0" encoding="utf-8"?>
 <p:sld xmlns:a="http://schemas.openxmlformats.org/drawingml/2006/main" xmlns:r="http://schemas.openxmlformats.org/officeDocument/2006/relationships" xmlns:p="http://schemas.openxmlformats.org/presentationml/2006/main">
   <p:cSld>
     <p:spTree>
@@ -17107,7 +17729,7 @@
 </p:sld>
 </file>
 
-<file path=ppt/slides/slide45.xml><?xml version="1.0" encoding="utf-8"?>
+<file path=ppt/slides/slide47.xml><?xml version="1.0" encoding="utf-8"?>
 <p:sld xmlns:a="http://schemas.openxmlformats.org/drawingml/2006/main" xmlns:r="http://schemas.openxmlformats.org/officeDocument/2006/relationships" xmlns:p="http://schemas.openxmlformats.org/presentationml/2006/main">
   <p:cSld>
     <p:spTree>
@@ -17433,7 +18055,7 @@
 </p:sld>
 </file>
 
-<file path=ppt/slides/slide46.xml><?xml version="1.0" encoding="utf-8"?>
+<file path=ppt/slides/slide48.xml><?xml version="1.0" encoding="utf-8"?>
 <p:sld xmlns:a="http://schemas.openxmlformats.org/drawingml/2006/main" xmlns:r="http://schemas.openxmlformats.org/officeDocument/2006/relationships" xmlns:p="http://schemas.openxmlformats.org/presentationml/2006/main">
   <p:cSld>
     <p:spTree>
@@ -17759,7 +18381,7 @@
 </p:sld>
 </file>
 
-<file path=ppt/slides/slide47.xml><?xml version="1.0" encoding="utf-8"?>
+<file path=ppt/slides/slide49.xml><?xml version="1.0" encoding="utf-8"?>
 <p:sld xmlns:a="http://schemas.openxmlformats.org/drawingml/2006/main" xmlns:r="http://schemas.openxmlformats.org/officeDocument/2006/relationships" xmlns:p="http://schemas.openxmlformats.org/presentationml/2006/main">
   <p:cSld>
     <p:spTree>
@@ -18058,645 +18680,6 @@
     <p:extLst>
       <p:ext uri="{BB962C8B-B14F-4D97-AF65-F5344CB8AC3E}">
         <p14:creationId xmlns:p14="http://schemas.microsoft.com/office/powerpoint/2010/main" val="2649205989"/>
-      </p:ext>
-    </p:extLst>
-  </p:cSld>
-  <p:clrMapOvr>
-    <a:masterClrMapping/>
-  </p:clrMapOvr>
-</p:sld>
-</file>
-
-<file path=ppt/slides/slide48.xml><?xml version="1.0" encoding="utf-8"?>
-<p:sld xmlns:a="http://schemas.openxmlformats.org/drawingml/2006/main" xmlns:r="http://schemas.openxmlformats.org/officeDocument/2006/relationships" xmlns:p="http://schemas.openxmlformats.org/presentationml/2006/main">
-  <p:cSld>
-    <p:spTree>
-      <p:nvGrpSpPr>
-        <p:cNvPr id="1" name="">
-          <a:extLst>
-            <a:ext uri="{FF2B5EF4-FFF2-40B4-BE49-F238E27FC236}">
-              <a16:creationId xmlns:a16="http://schemas.microsoft.com/office/drawing/2014/main" id="{F9E3A5BA-C561-3613-C671-689A03CA8583}"/>
-            </a:ext>
-          </a:extLst>
-        </p:cNvPr>
-        <p:cNvGrpSpPr/>
-        <p:nvPr/>
-      </p:nvGrpSpPr>
-      <p:grpSpPr>
-        <a:xfrm>
-          <a:off x="0" y="0"/>
-          <a:ext cx="0" cy="0"/>
-          <a:chOff x="0" y="0"/>
-          <a:chExt cx="0" cy="0"/>
-        </a:xfrm>
-      </p:grpSpPr>
-      <p:sp>
-        <p:nvSpPr>
-          <p:cNvPr id="2" name="제목 1">
-            <a:extLst>
-              <a:ext uri="{FF2B5EF4-FFF2-40B4-BE49-F238E27FC236}">
-                <a16:creationId xmlns:a16="http://schemas.microsoft.com/office/drawing/2014/main" id="{59519978-8EF1-BE83-99BF-355005C2BC03}"/>
-              </a:ext>
-            </a:extLst>
-          </p:cNvPr>
-          <p:cNvSpPr>
-            <a:spLocks noGrp="1"/>
-          </p:cNvSpPr>
-          <p:nvPr>
-            <p:ph type="title"/>
-          </p:nvPr>
-        </p:nvSpPr>
-        <p:spPr/>
-        <p:txBody>
-          <a:bodyPr/>
-          <a:lstStyle/>
-          <a:p>
-            <a:r>
-              <a:rPr lang="en-US" altLang="ko-KR" dirty="0"/>
-              <a:t>SD </a:t>
-            </a:r>
-            <a:r>
-              <a:rPr lang="ko-KR" altLang="en-US" dirty="0"/>
-              <a:t>파일시스템</a:t>
-            </a:r>
-          </a:p>
-        </p:txBody>
-      </p:sp>
-      <p:sp>
-        <p:nvSpPr>
-          <p:cNvPr id="3" name="Content Placeholder 2">
-            <a:extLst>
-              <a:ext uri="{FF2B5EF4-FFF2-40B4-BE49-F238E27FC236}">
-                <a16:creationId xmlns:a16="http://schemas.microsoft.com/office/drawing/2014/main" id="{A615E4C3-8878-44C7-2BF2-9D760CA7942C}"/>
-              </a:ext>
-            </a:extLst>
-          </p:cNvPr>
-          <p:cNvSpPr txBox="1">
-            <a:spLocks/>
-          </p:cNvSpPr>
-          <p:nvPr/>
-        </p:nvSpPr>
-        <p:spPr bwMode="auto">
-          <a:xfrm>
-            <a:off x="628650" y="692696"/>
-            <a:ext cx="7886700" cy="5544616"/>
-          </a:xfrm>
-          <a:prstGeom prst="rect">
-            <a:avLst/>
-          </a:prstGeom>
-          <a:noFill/>
-          <a:ln w="9525">
-            <a:noFill/>
-            <a:miter lim="800000"/>
-            <a:headEnd/>
-            <a:tailEnd/>
-          </a:ln>
-          <a:effectLst/>
-        </p:spPr>
-        <p:txBody>
-          <a:bodyPr vert="horz" wrap="square" lIns="91440" tIns="45720" rIns="91440" bIns="45720" numCol="1" anchor="t" anchorCtr="0" compatLnSpc="1">
-            <a:prstTxWarp prst="textNoShape">
-              <a:avLst/>
-            </a:prstTxWarp>
-            <a:normAutofit/>
-          </a:bodyPr>
-          <a:lstStyle>
-            <a:lvl1pPr marL="342900" indent="-342900" algn="l" rtl="0" fontAlgn="base" latinLnBrk="1">
-              <a:spcBef>
-                <a:spcPct val="20000"/>
-              </a:spcBef>
-              <a:spcAft>
-                <a:spcPct val="0"/>
-              </a:spcAft>
-              <a:buClr>
-                <a:schemeClr val="tx1"/>
-              </a:buClr>
-              <a:buChar char="•"/>
-              <a:defRPr kumimoji="1" sz="2000">
-                <a:solidFill>
-                  <a:schemeClr val="tx1"/>
-                </a:solidFill>
-                <a:latin typeface="Verdana" pitchFamily="34" charset="0"/>
-                <a:ea typeface="+mn-ea"/>
-                <a:cs typeface="+mn-cs"/>
-              </a:defRPr>
-            </a:lvl1pPr>
-            <a:lvl2pPr marL="742950" indent="-285750" algn="l" rtl="0" fontAlgn="base" latinLnBrk="1">
-              <a:spcBef>
-                <a:spcPct val="20000"/>
-              </a:spcBef>
-              <a:spcAft>
-                <a:spcPct val="0"/>
-              </a:spcAft>
-              <a:buClr>
-                <a:schemeClr val="tx1"/>
-              </a:buClr>
-              <a:buFont typeface="Wingdings" pitchFamily="2" charset="2"/>
-              <a:buChar char="Ø"/>
-              <a:defRPr kumimoji="1">
-                <a:solidFill>
-                  <a:schemeClr val="tx1"/>
-                </a:solidFill>
-                <a:latin typeface="Verdana" pitchFamily="34" charset="0"/>
-                <a:ea typeface="+mn-ea"/>
-              </a:defRPr>
-            </a:lvl2pPr>
-            <a:lvl3pPr marL="1143000" indent="-228600" algn="l" rtl="0" fontAlgn="base" latinLnBrk="1">
-              <a:spcBef>
-                <a:spcPct val="20000"/>
-              </a:spcBef>
-              <a:spcAft>
-                <a:spcPct val="0"/>
-              </a:spcAft>
-              <a:buClr>
-                <a:schemeClr val="tx1"/>
-              </a:buClr>
-              <a:buFont typeface="Wingdings" pitchFamily="2" charset="2"/>
-              <a:buChar char="§"/>
-              <a:defRPr kumimoji="1" sz="1600">
-                <a:solidFill>
-                  <a:schemeClr val="tx1"/>
-                </a:solidFill>
-                <a:latin typeface="Verdana" pitchFamily="34" charset="0"/>
-                <a:ea typeface="+mn-ea"/>
-              </a:defRPr>
-            </a:lvl3pPr>
-            <a:lvl4pPr marL="1600200" indent="-228600" algn="l" rtl="0" fontAlgn="base" latinLnBrk="1">
-              <a:spcBef>
-                <a:spcPct val="20000"/>
-              </a:spcBef>
-              <a:spcAft>
-                <a:spcPct val="0"/>
-              </a:spcAft>
-              <a:buClr>
-                <a:schemeClr val="bg2"/>
-              </a:buClr>
-              <a:buFont typeface="Wingdings 2" pitchFamily="18" charset="2"/>
-              <a:buChar char=""/>
-              <a:defRPr kumimoji="1" sz="2000">
-                <a:solidFill>
-                  <a:schemeClr val="tx1"/>
-                </a:solidFill>
-                <a:latin typeface="Verdana" pitchFamily="34" charset="0"/>
-                <a:ea typeface="+mn-ea"/>
-              </a:defRPr>
-            </a:lvl4pPr>
-            <a:lvl5pPr marL="2057400" indent="-228600" algn="l" rtl="0" fontAlgn="base" latinLnBrk="1">
-              <a:spcBef>
-                <a:spcPct val="20000"/>
-              </a:spcBef>
-              <a:spcAft>
-                <a:spcPct val="0"/>
-              </a:spcAft>
-              <a:buClr>
-                <a:schemeClr val="bg2"/>
-              </a:buClr>
-              <a:buFont typeface="Arial" charset="0"/>
-              <a:buChar char="»"/>
-              <a:defRPr kumimoji="1" sz="1600">
-                <a:solidFill>
-                  <a:schemeClr val="tx1"/>
-                </a:solidFill>
-                <a:latin typeface="Verdana" pitchFamily="34" charset="0"/>
-                <a:ea typeface="+mn-ea"/>
-              </a:defRPr>
-            </a:lvl5pPr>
-            <a:lvl6pPr marL="2514600" indent="-228600" algn="l" rtl="0" fontAlgn="base" latinLnBrk="1">
-              <a:spcBef>
-                <a:spcPct val="20000"/>
-              </a:spcBef>
-              <a:spcAft>
-                <a:spcPct val="0"/>
-              </a:spcAft>
-              <a:buClr>
-                <a:schemeClr val="bg2"/>
-              </a:buClr>
-              <a:buFont typeface="Arial" charset="0"/>
-              <a:buChar char="»"/>
-              <a:defRPr kumimoji="1" sz="1600">
-                <a:solidFill>
-                  <a:schemeClr val="tx1"/>
-                </a:solidFill>
-                <a:latin typeface="Arial" charset="0"/>
-                <a:ea typeface="+mn-ea"/>
-              </a:defRPr>
-            </a:lvl6pPr>
-            <a:lvl7pPr marL="2971800" indent="-228600" algn="l" rtl="0" fontAlgn="base" latinLnBrk="1">
-              <a:spcBef>
-                <a:spcPct val="20000"/>
-              </a:spcBef>
-              <a:spcAft>
-                <a:spcPct val="0"/>
-              </a:spcAft>
-              <a:buClr>
-                <a:schemeClr val="bg2"/>
-              </a:buClr>
-              <a:buFont typeface="Arial" charset="0"/>
-              <a:buChar char="»"/>
-              <a:defRPr kumimoji="1" sz="1600">
-                <a:solidFill>
-                  <a:schemeClr val="tx1"/>
-                </a:solidFill>
-                <a:latin typeface="Arial" charset="0"/>
-                <a:ea typeface="+mn-ea"/>
-              </a:defRPr>
-            </a:lvl7pPr>
-            <a:lvl8pPr marL="3429000" indent="-228600" algn="l" rtl="0" fontAlgn="base" latinLnBrk="1">
-              <a:spcBef>
-                <a:spcPct val="20000"/>
-              </a:spcBef>
-              <a:spcAft>
-                <a:spcPct val="0"/>
-              </a:spcAft>
-              <a:buClr>
-                <a:schemeClr val="bg2"/>
-              </a:buClr>
-              <a:buFont typeface="Arial" charset="0"/>
-              <a:buChar char="»"/>
-              <a:defRPr kumimoji="1" sz="1600">
-                <a:solidFill>
-                  <a:schemeClr val="tx1"/>
-                </a:solidFill>
-                <a:latin typeface="Arial" charset="0"/>
-                <a:ea typeface="+mn-ea"/>
-              </a:defRPr>
-            </a:lvl8pPr>
-            <a:lvl9pPr marL="3886200" indent="-228600" algn="l" rtl="0" fontAlgn="base" latinLnBrk="1">
-              <a:spcBef>
-                <a:spcPct val="20000"/>
-              </a:spcBef>
-              <a:spcAft>
-                <a:spcPct val="0"/>
-              </a:spcAft>
-              <a:buClr>
-                <a:schemeClr val="bg2"/>
-              </a:buClr>
-              <a:buFont typeface="Arial" charset="0"/>
-              <a:buChar char="»"/>
-              <a:defRPr kumimoji="1" sz="1600">
-                <a:solidFill>
-                  <a:schemeClr val="tx1"/>
-                </a:solidFill>
-                <a:latin typeface="Arial" charset="0"/>
-                <a:ea typeface="+mn-ea"/>
-              </a:defRPr>
-            </a:lvl9pPr>
-          </a:lstStyle>
-          <a:p>
-            <a:r>
-              <a:rPr lang="en-US" altLang="ko-KR" b="0" i="0" kern="0" dirty="0"/>
-              <a:t>FAT16: SD</a:t>
-            </a:r>
-          </a:p>
-          <a:p>
-            <a:r>
-              <a:rPr lang="en-US" altLang="ko-KR" b="0" i="0" kern="0" dirty="0"/>
-              <a:t>FAT32: SDHC</a:t>
-            </a:r>
-          </a:p>
-          <a:p>
-            <a:r>
-              <a:rPr lang="en-US" altLang="ko-KR" b="0" i="0" kern="0" dirty="0" err="1"/>
-              <a:t>exFAT</a:t>
-            </a:r>
-            <a:r>
-              <a:rPr lang="en-US" altLang="ko-KR" b="0" i="0" kern="0" dirty="0"/>
-              <a:t>: SDXC</a:t>
-            </a:r>
-          </a:p>
-        </p:txBody>
-      </p:sp>
-    </p:spTree>
-    <p:extLst>
-      <p:ext uri="{BB962C8B-B14F-4D97-AF65-F5344CB8AC3E}">
-        <p14:creationId xmlns:p14="http://schemas.microsoft.com/office/powerpoint/2010/main" val="3904142945"/>
-      </p:ext>
-    </p:extLst>
-  </p:cSld>
-  <p:clrMapOvr>
-    <a:masterClrMapping/>
-  </p:clrMapOvr>
-</p:sld>
-</file>
-
-<file path=ppt/slides/slide49.xml><?xml version="1.0" encoding="utf-8"?>
-<p:sld xmlns:a="http://schemas.openxmlformats.org/drawingml/2006/main" xmlns:r="http://schemas.openxmlformats.org/officeDocument/2006/relationships" xmlns:p="http://schemas.openxmlformats.org/presentationml/2006/main">
-  <p:cSld>
-    <p:spTree>
-      <p:nvGrpSpPr>
-        <p:cNvPr id="1" name="">
-          <a:extLst>
-            <a:ext uri="{FF2B5EF4-FFF2-40B4-BE49-F238E27FC236}">
-              <a16:creationId xmlns:a16="http://schemas.microsoft.com/office/drawing/2014/main" id="{1E3D6F10-F1DB-9D05-5B2F-617E8B9B9923}"/>
-            </a:ext>
-          </a:extLst>
-        </p:cNvPr>
-        <p:cNvGrpSpPr/>
-        <p:nvPr/>
-      </p:nvGrpSpPr>
-      <p:grpSpPr>
-        <a:xfrm>
-          <a:off x="0" y="0"/>
-          <a:ext cx="0" cy="0"/>
-          <a:chOff x="0" y="0"/>
-          <a:chExt cx="0" cy="0"/>
-        </a:xfrm>
-      </p:grpSpPr>
-      <p:sp>
-        <p:nvSpPr>
-          <p:cNvPr id="2" name="제목 1">
-            <a:extLst>
-              <a:ext uri="{FF2B5EF4-FFF2-40B4-BE49-F238E27FC236}">
-                <a16:creationId xmlns:a16="http://schemas.microsoft.com/office/drawing/2014/main" id="{25ECB2B0-9D0B-02BF-6AD8-EB90D368471F}"/>
-              </a:ext>
-            </a:extLst>
-          </p:cNvPr>
-          <p:cNvSpPr>
-            <a:spLocks noGrp="1"/>
-          </p:cNvSpPr>
-          <p:nvPr>
-            <p:ph type="title"/>
-          </p:nvPr>
-        </p:nvSpPr>
-        <p:spPr/>
-        <p:txBody>
-          <a:bodyPr/>
-          <a:lstStyle/>
-          <a:p>
-            <a:r>
-              <a:rPr lang="en-US" altLang="ko-KR" dirty="0"/>
-              <a:t>SRAM </a:t>
-            </a:r>
-            <a:r>
-              <a:rPr lang="ko-KR" altLang="en-US" dirty="0"/>
-              <a:t>회로도</a:t>
-            </a:r>
-          </a:p>
-        </p:txBody>
-      </p:sp>
-      <p:sp>
-        <p:nvSpPr>
-          <p:cNvPr id="3" name="Content Placeholder 2">
-            <a:extLst>
-              <a:ext uri="{FF2B5EF4-FFF2-40B4-BE49-F238E27FC236}">
-                <a16:creationId xmlns:a16="http://schemas.microsoft.com/office/drawing/2014/main" id="{0FD67763-CE6F-7941-2A00-E8D46611AC57}"/>
-              </a:ext>
-            </a:extLst>
-          </p:cNvPr>
-          <p:cNvSpPr txBox="1">
-            <a:spLocks/>
-          </p:cNvSpPr>
-          <p:nvPr/>
-        </p:nvSpPr>
-        <p:spPr bwMode="auto">
-          <a:xfrm>
-            <a:off x="628650" y="692696"/>
-            <a:ext cx="7886700" cy="5544616"/>
-          </a:xfrm>
-          <a:prstGeom prst="rect">
-            <a:avLst/>
-          </a:prstGeom>
-          <a:noFill/>
-          <a:ln w="9525">
-            <a:noFill/>
-            <a:miter lim="800000"/>
-            <a:headEnd/>
-            <a:tailEnd/>
-          </a:ln>
-          <a:effectLst/>
-        </p:spPr>
-        <p:txBody>
-          <a:bodyPr vert="horz" wrap="square" lIns="91440" tIns="45720" rIns="91440" bIns="45720" numCol="1" anchor="t" anchorCtr="0" compatLnSpc="1">
-            <a:prstTxWarp prst="textNoShape">
-              <a:avLst/>
-            </a:prstTxWarp>
-            <a:normAutofit/>
-          </a:bodyPr>
-          <a:lstStyle>
-            <a:lvl1pPr marL="342900" indent="-342900" algn="l" rtl="0" fontAlgn="base" latinLnBrk="1">
-              <a:spcBef>
-                <a:spcPct val="20000"/>
-              </a:spcBef>
-              <a:spcAft>
-                <a:spcPct val="0"/>
-              </a:spcAft>
-              <a:buClr>
-                <a:schemeClr val="tx1"/>
-              </a:buClr>
-              <a:buChar char="•"/>
-              <a:defRPr kumimoji="1" sz="2000">
-                <a:solidFill>
-                  <a:schemeClr val="tx1"/>
-                </a:solidFill>
-                <a:latin typeface="Verdana" pitchFamily="34" charset="0"/>
-                <a:ea typeface="+mn-ea"/>
-                <a:cs typeface="+mn-cs"/>
-              </a:defRPr>
-            </a:lvl1pPr>
-            <a:lvl2pPr marL="742950" indent="-285750" algn="l" rtl="0" fontAlgn="base" latinLnBrk="1">
-              <a:spcBef>
-                <a:spcPct val="20000"/>
-              </a:spcBef>
-              <a:spcAft>
-                <a:spcPct val="0"/>
-              </a:spcAft>
-              <a:buClr>
-                <a:schemeClr val="tx1"/>
-              </a:buClr>
-              <a:buFont typeface="Wingdings" pitchFamily="2" charset="2"/>
-              <a:buChar char="Ø"/>
-              <a:defRPr kumimoji="1">
-                <a:solidFill>
-                  <a:schemeClr val="tx1"/>
-                </a:solidFill>
-                <a:latin typeface="Verdana" pitchFamily="34" charset="0"/>
-                <a:ea typeface="+mn-ea"/>
-              </a:defRPr>
-            </a:lvl2pPr>
-            <a:lvl3pPr marL="1143000" indent="-228600" algn="l" rtl="0" fontAlgn="base" latinLnBrk="1">
-              <a:spcBef>
-                <a:spcPct val="20000"/>
-              </a:spcBef>
-              <a:spcAft>
-                <a:spcPct val="0"/>
-              </a:spcAft>
-              <a:buClr>
-                <a:schemeClr val="tx1"/>
-              </a:buClr>
-              <a:buFont typeface="Wingdings" pitchFamily="2" charset="2"/>
-              <a:buChar char="§"/>
-              <a:defRPr kumimoji="1" sz="1600">
-                <a:solidFill>
-                  <a:schemeClr val="tx1"/>
-                </a:solidFill>
-                <a:latin typeface="Verdana" pitchFamily="34" charset="0"/>
-                <a:ea typeface="+mn-ea"/>
-              </a:defRPr>
-            </a:lvl3pPr>
-            <a:lvl4pPr marL="1600200" indent="-228600" algn="l" rtl="0" fontAlgn="base" latinLnBrk="1">
-              <a:spcBef>
-                <a:spcPct val="20000"/>
-              </a:spcBef>
-              <a:spcAft>
-                <a:spcPct val="0"/>
-              </a:spcAft>
-              <a:buClr>
-                <a:schemeClr val="bg2"/>
-              </a:buClr>
-              <a:buFont typeface="Wingdings 2" pitchFamily="18" charset="2"/>
-              <a:buChar char=""/>
-              <a:defRPr kumimoji="1" sz="2000">
-                <a:solidFill>
-                  <a:schemeClr val="tx1"/>
-                </a:solidFill>
-                <a:latin typeface="Verdana" pitchFamily="34" charset="0"/>
-                <a:ea typeface="+mn-ea"/>
-              </a:defRPr>
-            </a:lvl4pPr>
-            <a:lvl5pPr marL="2057400" indent="-228600" algn="l" rtl="0" fontAlgn="base" latinLnBrk="1">
-              <a:spcBef>
-                <a:spcPct val="20000"/>
-              </a:spcBef>
-              <a:spcAft>
-                <a:spcPct val="0"/>
-              </a:spcAft>
-              <a:buClr>
-                <a:schemeClr val="bg2"/>
-              </a:buClr>
-              <a:buFont typeface="Arial" charset="0"/>
-              <a:buChar char="»"/>
-              <a:defRPr kumimoji="1" sz="1600">
-                <a:solidFill>
-                  <a:schemeClr val="tx1"/>
-                </a:solidFill>
-                <a:latin typeface="Verdana" pitchFamily="34" charset="0"/>
-                <a:ea typeface="+mn-ea"/>
-              </a:defRPr>
-            </a:lvl5pPr>
-            <a:lvl6pPr marL="2514600" indent="-228600" algn="l" rtl="0" fontAlgn="base" latinLnBrk="1">
-              <a:spcBef>
-                <a:spcPct val="20000"/>
-              </a:spcBef>
-              <a:spcAft>
-                <a:spcPct val="0"/>
-              </a:spcAft>
-              <a:buClr>
-                <a:schemeClr val="bg2"/>
-              </a:buClr>
-              <a:buFont typeface="Arial" charset="0"/>
-              <a:buChar char="»"/>
-              <a:defRPr kumimoji="1" sz="1600">
-                <a:solidFill>
-                  <a:schemeClr val="tx1"/>
-                </a:solidFill>
-                <a:latin typeface="Arial" charset="0"/>
-                <a:ea typeface="+mn-ea"/>
-              </a:defRPr>
-            </a:lvl6pPr>
-            <a:lvl7pPr marL="2971800" indent="-228600" algn="l" rtl="0" fontAlgn="base" latinLnBrk="1">
-              <a:spcBef>
-                <a:spcPct val="20000"/>
-              </a:spcBef>
-              <a:spcAft>
-                <a:spcPct val="0"/>
-              </a:spcAft>
-              <a:buClr>
-                <a:schemeClr val="bg2"/>
-              </a:buClr>
-              <a:buFont typeface="Arial" charset="0"/>
-              <a:buChar char="»"/>
-              <a:defRPr kumimoji="1" sz="1600">
-                <a:solidFill>
-                  <a:schemeClr val="tx1"/>
-                </a:solidFill>
-                <a:latin typeface="Arial" charset="0"/>
-                <a:ea typeface="+mn-ea"/>
-              </a:defRPr>
-            </a:lvl7pPr>
-            <a:lvl8pPr marL="3429000" indent="-228600" algn="l" rtl="0" fontAlgn="base" latinLnBrk="1">
-              <a:spcBef>
-                <a:spcPct val="20000"/>
-              </a:spcBef>
-              <a:spcAft>
-                <a:spcPct val="0"/>
-              </a:spcAft>
-              <a:buClr>
-                <a:schemeClr val="bg2"/>
-              </a:buClr>
-              <a:buFont typeface="Arial" charset="0"/>
-              <a:buChar char="»"/>
-              <a:defRPr kumimoji="1" sz="1600">
-                <a:solidFill>
-                  <a:schemeClr val="tx1"/>
-                </a:solidFill>
-                <a:latin typeface="Arial" charset="0"/>
-                <a:ea typeface="+mn-ea"/>
-              </a:defRPr>
-            </a:lvl8pPr>
-            <a:lvl9pPr marL="3886200" indent="-228600" algn="l" rtl="0" fontAlgn="base" latinLnBrk="1">
-              <a:spcBef>
-                <a:spcPct val="20000"/>
-              </a:spcBef>
-              <a:spcAft>
-                <a:spcPct val="0"/>
-              </a:spcAft>
-              <a:buClr>
-                <a:schemeClr val="bg2"/>
-              </a:buClr>
-              <a:buFont typeface="Arial" charset="0"/>
-              <a:buChar char="»"/>
-              <a:defRPr kumimoji="1" sz="1600">
-                <a:solidFill>
-                  <a:schemeClr val="tx1"/>
-                </a:solidFill>
-                <a:latin typeface="Arial" charset="0"/>
-                <a:ea typeface="+mn-ea"/>
-              </a:defRPr>
-            </a:lvl9pPr>
-          </a:lstStyle>
-          <a:p>
-            <a:r>
-              <a:rPr lang="en-US" altLang="ko-KR" b="0" i="0" kern="0"/>
-              <a:t>IS61WV51216xLL</a:t>
-            </a:r>
-            <a:endParaRPr lang="en-US" altLang="ko-KR" b="0" i="0" kern="0" dirty="0"/>
-          </a:p>
-        </p:txBody>
-      </p:sp>
-      <p:pic>
-        <p:nvPicPr>
-          <p:cNvPr id="5" name="그림 4" descr="텍스트, 도표, 스크린샷, 평행이(가) 표시된 사진&#10;&#10;AI 생성 콘텐츠는 정확하지 않을 수 있습니다.">
-            <a:extLst>
-              <a:ext uri="{FF2B5EF4-FFF2-40B4-BE49-F238E27FC236}">
-                <a16:creationId xmlns:a16="http://schemas.microsoft.com/office/drawing/2014/main" id="{EA4A89C5-7EBD-7385-1887-5EA66CEB61EC}"/>
-              </a:ext>
-            </a:extLst>
-          </p:cNvPr>
-          <p:cNvPicPr>
-            <a:picLocks noChangeAspect="1"/>
-          </p:cNvPicPr>
-          <p:nvPr/>
-        </p:nvPicPr>
-        <p:blipFill>
-          <a:blip r:embed="rId2"/>
-          <a:stretch>
-            <a:fillRect/>
-          </a:stretch>
-        </p:blipFill>
-        <p:spPr>
-          <a:xfrm>
-            <a:off x="1259632" y="1207509"/>
-            <a:ext cx="6978922" cy="5147511"/>
-          </a:xfrm>
-          <a:prstGeom prst="rect">
-            <a:avLst/>
-          </a:prstGeom>
-        </p:spPr>
-      </p:pic>
-    </p:spTree>
-    <p:extLst>
-      <p:ext uri="{BB962C8B-B14F-4D97-AF65-F5344CB8AC3E}">
-        <p14:creationId xmlns:p14="http://schemas.microsoft.com/office/powerpoint/2010/main" val="178945844"/>
       </p:ext>
     </p:extLst>
   </p:cSld>
@@ -19123,6 +19106,645 @@
         <p:cNvPr id="1" name="">
           <a:extLst>
             <a:ext uri="{FF2B5EF4-FFF2-40B4-BE49-F238E27FC236}">
+              <a16:creationId xmlns:a16="http://schemas.microsoft.com/office/drawing/2014/main" id="{F9E3A5BA-C561-3613-C671-689A03CA8583}"/>
+            </a:ext>
+          </a:extLst>
+        </p:cNvPr>
+        <p:cNvGrpSpPr/>
+        <p:nvPr/>
+      </p:nvGrpSpPr>
+      <p:grpSpPr>
+        <a:xfrm>
+          <a:off x="0" y="0"/>
+          <a:ext cx="0" cy="0"/>
+          <a:chOff x="0" y="0"/>
+          <a:chExt cx="0" cy="0"/>
+        </a:xfrm>
+      </p:grpSpPr>
+      <p:sp>
+        <p:nvSpPr>
+          <p:cNvPr id="2" name="제목 1">
+            <a:extLst>
+              <a:ext uri="{FF2B5EF4-FFF2-40B4-BE49-F238E27FC236}">
+                <a16:creationId xmlns:a16="http://schemas.microsoft.com/office/drawing/2014/main" id="{59519978-8EF1-BE83-99BF-355005C2BC03}"/>
+              </a:ext>
+            </a:extLst>
+          </p:cNvPr>
+          <p:cNvSpPr>
+            <a:spLocks noGrp="1"/>
+          </p:cNvSpPr>
+          <p:nvPr>
+            <p:ph type="title"/>
+          </p:nvPr>
+        </p:nvSpPr>
+        <p:spPr/>
+        <p:txBody>
+          <a:bodyPr/>
+          <a:lstStyle/>
+          <a:p>
+            <a:r>
+              <a:rPr lang="en-US" altLang="ko-KR" dirty="0"/>
+              <a:t>SD </a:t>
+            </a:r>
+            <a:r>
+              <a:rPr lang="ko-KR" altLang="en-US" dirty="0"/>
+              <a:t>파일시스템</a:t>
+            </a:r>
+          </a:p>
+        </p:txBody>
+      </p:sp>
+      <p:sp>
+        <p:nvSpPr>
+          <p:cNvPr id="3" name="Content Placeholder 2">
+            <a:extLst>
+              <a:ext uri="{FF2B5EF4-FFF2-40B4-BE49-F238E27FC236}">
+                <a16:creationId xmlns:a16="http://schemas.microsoft.com/office/drawing/2014/main" id="{A615E4C3-8878-44C7-2BF2-9D760CA7942C}"/>
+              </a:ext>
+            </a:extLst>
+          </p:cNvPr>
+          <p:cNvSpPr txBox="1">
+            <a:spLocks/>
+          </p:cNvSpPr>
+          <p:nvPr/>
+        </p:nvSpPr>
+        <p:spPr bwMode="auto">
+          <a:xfrm>
+            <a:off x="628650" y="692696"/>
+            <a:ext cx="7886700" cy="5544616"/>
+          </a:xfrm>
+          <a:prstGeom prst="rect">
+            <a:avLst/>
+          </a:prstGeom>
+          <a:noFill/>
+          <a:ln w="9525">
+            <a:noFill/>
+            <a:miter lim="800000"/>
+            <a:headEnd/>
+            <a:tailEnd/>
+          </a:ln>
+          <a:effectLst/>
+        </p:spPr>
+        <p:txBody>
+          <a:bodyPr vert="horz" wrap="square" lIns="91440" tIns="45720" rIns="91440" bIns="45720" numCol="1" anchor="t" anchorCtr="0" compatLnSpc="1">
+            <a:prstTxWarp prst="textNoShape">
+              <a:avLst/>
+            </a:prstTxWarp>
+            <a:normAutofit/>
+          </a:bodyPr>
+          <a:lstStyle>
+            <a:lvl1pPr marL="342900" indent="-342900" algn="l" rtl="0" fontAlgn="base" latinLnBrk="1">
+              <a:spcBef>
+                <a:spcPct val="20000"/>
+              </a:spcBef>
+              <a:spcAft>
+                <a:spcPct val="0"/>
+              </a:spcAft>
+              <a:buClr>
+                <a:schemeClr val="tx1"/>
+              </a:buClr>
+              <a:buChar char="•"/>
+              <a:defRPr kumimoji="1" sz="2000">
+                <a:solidFill>
+                  <a:schemeClr val="tx1"/>
+                </a:solidFill>
+                <a:latin typeface="Verdana" pitchFamily="34" charset="0"/>
+                <a:ea typeface="+mn-ea"/>
+                <a:cs typeface="+mn-cs"/>
+              </a:defRPr>
+            </a:lvl1pPr>
+            <a:lvl2pPr marL="742950" indent="-285750" algn="l" rtl="0" fontAlgn="base" latinLnBrk="1">
+              <a:spcBef>
+                <a:spcPct val="20000"/>
+              </a:spcBef>
+              <a:spcAft>
+                <a:spcPct val="0"/>
+              </a:spcAft>
+              <a:buClr>
+                <a:schemeClr val="tx1"/>
+              </a:buClr>
+              <a:buFont typeface="Wingdings" pitchFamily="2" charset="2"/>
+              <a:buChar char="Ø"/>
+              <a:defRPr kumimoji="1">
+                <a:solidFill>
+                  <a:schemeClr val="tx1"/>
+                </a:solidFill>
+                <a:latin typeface="Verdana" pitchFamily="34" charset="0"/>
+                <a:ea typeface="+mn-ea"/>
+              </a:defRPr>
+            </a:lvl2pPr>
+            <a:lvl3pPr marL="1143000" indent="-228600" algn="l" rtl="0" fontAlgn="base" latinLnBrk="1">
+              <a:spcBef>
+                <a:spcPct val="20000"/>
+              </a:spcBef>
+              <a:spcAft>
+                <a:spcPct val="0"/>
+              </a:spcAft>
+              <a:buClr>
+                <a:schemeClr val="tx1"/>
+              </a:buClr>
+              <a:buFont typeface="Wingdings" pitchFamily="2" charset="2"/>
+              <a:buChar char="§"/>
+              <a:defRPr kumimoji="1" sz="1600">
+                <a:solidFill>
+                  <a:schemeClr val="tx1"/>
+                </a:solidFill>
+                <a:latin typeface="Verdana" pitchFamily="34" charset="0"/>
+                <a:ea typeface="+mn-ea"/>
+              </a:defRPr>
+            </a:lvl3pPr>
+            <a:lvl4pPr marL="1600200" indent="-228600" algn="l" rtl="0" fontAlgn="base" latinLnBrk="1">
+              <a:spcBef>
+                <a:spcPct val="20000"/>
+              </a:spcBef>
+              <a:spcAft>
+                <a:spcPct val="0"/>
+              </a:spcAft>
+              <a:buClr>
+                <a:schemeClr val="bg2"/>
+              </a:buClr>
+              <a:buFont typeface="Wingdings 2" pitchFamily="18" charset="2"/>
+              <a:buChar char=""/>
+              <a:defRPr kumimoji="1" sz="2000">
+                <a:solidFill>
+                  <a:schemeClr val="tx1"/>
+                </a:solidFill>
+                <a:latin typeface="Verdana" pitchFamily="34" charset="0"/>
+                <a:ea typeface="+mn-ea"/>
+              </a:defRPr>
+            </a:lvl4pPr>
+            <a:lvl5pPr marL="2057400" indent="-228600" algn="l" rtl="0" fontAlgn="base" latinLnBrk="1">
+              <a:spcBef>
+                <a:spcPct val="20000"/>
+              </a:spcBef>
+              <a:spcAft>
+                <a:spcPct val="0"/>
+              </a:spcAft>
+              <a:buClr>
+                <a:schemeClr val="bg2"/>
+              </a:buClr>
+              <a:buFont typeface="Arial" charset="0"/>
+              <a:buChar char="»"/>
+              <a:defRPr kumimoji="1" sz="1600">
+                <a:solidFill>
+                  <a:schemeClr val="tx1"/>
+                </a:solidFill>
+                <a:latin typeface="Verdana" pitchFamily="34" charset="0"/>
+                <a:ea typeface="+mn-ea"/>
+              </a:defRPr>
+            </a:lvl5pPr>
+            <a:lvl6pPr marL="2514600" indent="-228600" algn="l" rtl="0" fontAlgn="base" latinLnBrk="1">
+              <a:spcBef>
+                <a:spcPct val="20000"/>
+              </a:spcBef>
+              <a:spcAft>
+                <a:spcPct val="0"/>
+              </a:spcAft>
+              <a:buClr>
+                <a:schemeClr val="bg2"/>
+              </a:buClr>
+              <a:buFont typeface="Arial" charset="0"/>
+              <a:buChar char="»"/>
+              <a:defRPr kumimoji="1" sz="1600">
+                <a:solidFill>
+                  <a:schemeClr val="tx1"/>
+                </a:solidFill>
+                <a:latin typeface="Arial" charset="0"/>
+                <a:ea typeface="+mn-ea"/>
+              </a:defRPr>
+            </a:lvl6pPr>
+            <a:lvl7pPr marL="2971800" indent="-228600" algn="l" rtl="0" fontAlgn="base" latinLnBrk="1">
+              <a:spcBef>
+                <a:spcPct val="20000"/>
+              </a:spcBef>
+              <a:spcAft>
+                <a:spcPct val="0"/>
+              </a:spcAft>
+              <a:buClr>
+                <a:schemeClr val="bg2"/>
+              </a:buClr>
+              <a:buFont typeface="Arial" charset="0"/>
+              <a:buChar char="»"/>
+              <a:defRPr kumimoji="1" sz="1600">
+                <a:solidFill>
+                  <a:schemeClr val="tx1"/>
+                </a:solidFill>
+                <a:latin typeface="Arial" charset="0"/>
+                <a:ea typeface="+mn-ea"/>
+              </a:defRPr>
+            </a:lvl7pPr>
+            <a:lvl8pPr marL="3429000" indent="-228600" algn="l" rtl="0" fontAlgn="base" latinLnBrk="1">
+              <a:spcBef>
+                <a:spcPct val="20000"/>
+              </a:spcBef>
+              <a:spcAft>
+                <a:spcPct val="0"/>
+              </a:spcAft>
+              <a:buClr>
+                <a:schemeClr val="bg2"/>
+              </a:buClr>
+              <a:buFont typeface="Arial" charset="0"/>
+              <a:buChar char="»"/>
+              <a:defRPr kumimoji="1" sz="1600">
+                <a:solidFill>
+                  <a:schemeClr val="tx1"/>
+                </a:solidFill>
+                <a:latin typeface="Arial" charset="0"/>
+                <a:ea typeface="+mn-ea"/>
+              </a:defRPr>
+            </a:lvl8pPr>
+            <a:lvl9pPr marL="3886200" indent="-228600" algn="l" rtl="0" fontAlgn="base" latinLnBrk="1">
+              <a:spcBef>
+                <a:spcPct val="20000"/>
+              </a:spcBef>
+              <a:spcAft>
+                <a:spcPct val="0"/>
+              </a:spcAft>
+              <a:buClr>
+                <a:schemeClr val="bg2"/>
+              </a:buClr>
+              <a:buFont typeface="Arial" charset="0"/>
+              <a:buChar char="»"/>
+              <a:defRPr kumimoji="1" sz="1600">
+                <a:solidFill>
+                  <a:schemeClr val="tx1"/>
+                </a:solidFill>
+                <a:latin typeface="Arial" charset="0"/>
+                <a:ea typeface="+mn-ea"/>
+              </a:defRPr>
+            </a:lvl9pPr>
+          </a:lstStyle>
+          <a:p>
+            <a:r>
+              <a:rPr lang="en-US" altLang="ko-KR" b="0" i="0" kern="0" dirty="0"/>
+              <a:t>FAT16: SD</a:t>
+            </a:r>
+          </a:p>
+          <a:p>
+            <a:r>
+              <a:rPr lang="en-US" altLang="ko-KR" b="0" i="0" kern="0" dirty="0"/>
+              <a:t>FAT32: SDHC</a:t>
+            </a:r>
+          </a:p>
+          <a:p>
+            <a:r>
+              <a:rPr lang="en-US" altLang="ko-KR" b="0" i="0" kern="0" dirty="0" err="1"/>
+              <a:t>exFAT</a:t>
+            </a:r>
+            <a:r>
+              <a:rPr lang="en-US" altLang="ko-KR" b="0" i="0" kern="0" dirty="0"/>
+              <a:t>: SDXC</a:t>
+            </a:r>
+          </a:p>
+        </p:txBody>
+      </p:sp>
+    </p:spTree>
+    <p:extLst>
+      <p:ext uri="{BB962C8B-B14F-4D97-AF65-F5344CB8AC3E}">
+        <p14:creationId xmlns:p14="http://schemas.microsoft.com/office/powerpoint/2010/main" val="3904142945"/>
+      </p:ext>
+    </p:extLst>
+  </p:cSld>
+  <p:clrMapOvr>
+    <a:masterClrMapping/>
+  </p:clrMapOvr>
+</p:sld>
+</file>
+
+<file path=ppt/slides/slide51.xml><?xml version="1.0" encoding="utf-8"?>
+<p:sld xmlns:a="http://schemas.openxmlformats.org/drawingml/2006/main" xmlns:r="http://schemas.openxmlformats.org/officeDocument/2006/relationships" xmlns:p="http://schemas.openxmlformats.org/presentationml/2006/main">
+  <p:cSld>
+    <p:spTree>
+      <p:nvGrpSpPr>
+        <p:cNvPr id="1" name="">
+          <a:extLst>
+            <a:ext uri="{FF2B5EF4-FFF2-40B4-BE49-F238E27FC236}">
+              <a16:creationId xmlns:a16="http://schemas.microsoft.com/office/drawing/2014/main" id="{1E3D6F10-F1DB-9D05-5B2F-617E8B9B9923}"/>
+            </a:ext>
+          </a:extLst>
+        </p:cNvPr>
+        <p:cNvGrpSpPr/>
+        <p:nvPr/>
+      </p:nvGrpSpPr>
+      <p:grpSpPr>
+        <a:xfrm>
+          <a:off x="0" y="0"/>
+          <a:ext cx="0" cy="0"/>
+          <a:chOff x="0" y="0"/>
+          <a:chExt cx="0" cy="0"/>
+        </a:xfrm>
+      </p:grpSpPr>
+      <p:sp>
+        <p:nvSpPr>
+          <p:cNvPr id="2" name="제목 1">
+            <a:extLst>
+              <a:ext uri="{FF2B5EF4-FFF2-40B4-BE49-F238E27FC236}">
+                <a16:creationId xmlns:a16="http://schemas.microsoft.com/office/drawing/2014/main" id="{25ECB2B0-9D0B-02BF-6AD8-EB90D368471F}"/>
+              </a:ext>
+            </a:extLst>
+          </p:cNvPr>
+          <p:cNvSpPr>
+            <a:spLocks noGrp="1"/>
+          </p:cNvSpPr>
+          <p:nvPr>
+            <p:ph type="title"/>
+          </p:nvPr>
+        </p:nvSpPr>
+        <p:spPr/>
+        <p:txBody>
+          <a:bodyPr/>
+          <a:lstStyle/>
+          <a:p>
+            <a:r>
+              <a:rPr lang="en-US" altLang="ko-KR" dirty="0"/>
+              <a:t>SRAM </a:t>
+            </a:r>
+            <a:r>
+              <a:rPr lang="ko-KR" altLang="en-US" dirty="0"/>
+              <a:t>회로도</a:t>
+            </a:r>
+          </a:p>
+        </p:txBody>
+      </p:sp>
+      <p:sp>
+        <p:nvSpPr>
+          <p:cNvPr id="3" name="Content Placeholder 2">
+            <a:extLst>
+              <a:ext uri="{FF2B5EF4-FFF2-40B4-BE49-F238E27FC236}">
+                <a16:creationId xmlns:a16="http://schemas.microsoft.com/office/drawing/2014/main" id="{0FD67763-CE6F-7941-2A00-E8D46611AC57}"/>
+              </a:ext>
+            </a:extLst>
+          </p:cNvPr>
+          <p:cNvSpPr txBox="1">
+            <a:spLocks/>
+          </p:cNvSpPr>
+          <p:nvPr/>
+        </p:nvSpPr>
+        <p:spPr bwMode="auto">
+          <a:xfrm>
+            <a:off x="628650" y="692696"/>
+            <a:ext cx="7886700" cy="5544616"/>
+          </a:xfrm>
+          <a:prstGeom prst="rect">
+            <a:avLst/>
+          </a:prstGeom>
+          <a:noFill/>
+          <a:ln w="9525">
+            <a:noFill/>
+            <a:miter lim="800000"/>
+            <a:headEnd/>
+            <a:tailEnd/>
+          </a:ln>
+          <a:effectLst/>
+        </p:spPr>
+        <p:txBody>
+          <a:bodyPr vert="horz" wrap="square" lIns="91440" tIns="45720" rIns="91440" bIns="45720" numCol="1" anchor="t" anchorCtr="0" compatLnSpc="1">
+            <a:prstTxWarp prst="textNoShape">
+              <a:avLst/>
+            </a:prstTxWarp>
+            <a:normAutofit/>
+          </a:bodyPr>
+          <a:lstStyle>
+            <a:lvl1pPr marL="342900" indent="-342900" algn="l" rtl="0" fontAlgn="base" latinLnBrk="1">
+              <a:spcBef>
+                <a:spcPct val="20000"/>
+              </a:spcBef>
+              <a:spcAft>
+                <a:spcPct val="0"/>
+              </a:spcAft>
+              <a:buClr>
+                <a:schemeClr val="tx1"/>
+              </a:buClr>
+              <a:buChar char="•"/>
+              <a:defRPr kumimoji="1" sz="2000">
+                <a:solidFill>
+                  <a:schemeClr val="tx1"/>
+                </a:solidFill>
+                <a:latin typeface="Verdana" pitchFamily="34" charset="0"/>
+                <a:ea typeface="+mn-ea"/>
+                <a:cs typeface="+mn-cs"/>
+              </a:defRPr>
+            </a:lvl1pPr>
+            <a:lvl2pPr marL="742950" indent="-285750" algn="l" rtl="0" fontAlgn="base" latinLnBrk="1">
+              <a:spcBef>
+                <a:spcPct val="20000"/>
+              </a:spcBef>
+              <a:spcAft>
+                <a:spcPct val="0"/>
+              </a:spcAft>
+              <a:buClr>
+                <a:schemeClr val="tx1"/>
+              </a:buClr>
+              <a:buFont typeface="Wingdings" pitchFamily="2" charset="2"/>
+              <a:buChar char="Ø"/>
+              <a:defRPr kumimoji="1">
+                <a:solidFill>
+                  <a:schemeClr val="tx1"/>
+                </a:solidFill>
+                <a:latin typeface="Verdana" pitchFamily="34" charset="0"/>
+                <a:ea typeface="+mn-ea"/>
+              </a:defRPr>
+            </a:lvl2pPr>
+            <a:lvl3pPr marL="1143000" indent="-228600" algn="l" rtl="0" fontAlgn="base" latinLnBrk="1">
+              <a:spcBef>
+                <a:spcPct val="20000"/>
+              </a:spcBef>
+              <a:spcAft>
+                <a:spcPct val="0"/>
+              </a:spcAft>
+              <a:buClr>
+                <a:schemeClr val="tx1"/>
+              </a:buClr>
+              <a:buFont typeface="Wingdings" pitchFamily="2" charset="2"/>
+              <a:buChar char="§"/>
+              <a:defRPr kumimoji="1" sz="1600">
+                <a:solidFill>
+                  <a:schemeClr val="tx1"/>
+                </a:solidFill>
+                <a:latin typeface="Verdana" pitchFamily="34" charset="0"/>
+                <a:ea typeface="+mn-ea"/>
+              </a:defRPr>
+            </a:lvl3pPr>
+            <a:lvl4pPr marL="1600200" indent="-228600" algn="l" rtl="0" fontAlgn="base" latinLnBrk="1">
+              <a:spcBef>
+                <a:spcPct val="20000"/>
+              </a:spcBef>
+              <a:spcAft>
+                <a:spcPct val="0"/>
+              </a:spcAft>
+              <a:buClr>
+                <a:schemeClr val="bg2"/>
+              </a:buClr>
+              <a:buFont typeface="Wingdings 2" pitchFamily="18" charset="2"/>
+              <a:buChar char=""/>
+              <a:defRPr kumimoji="1" sz="2000">
+                <a:solidFill>
+                  <a:schemeClr val="tx1"/>
+                </a:solidFill>
+                <a:latin typeface="Verdana" pitchFamily="34" charset="0"/>
+                <a:ea typeface="+mn-ea"/>
+              </a:defRPr>
+            </a:lvl4pPr>
+            <a:lvl5pPr marL="2057400" indent="-228600" algn="l" rtl="0" fontAlgn="base" latinLnBrk="1">
+              <a:spcBef>
+                <a:spcPct val="20000"/>
+              </a:spcBef>
+              <a:spcAft>
+                <a:spcPct val="0"/>
+              </a:spcAft>
+              <a:buClr>
+                <a:schemeClr val="bg2"/>
+              </a:buClr>
+              <a:buFont typeface="Arial" charset="0"/>
+              <a:buChar char="»"/>
+              <a:defRPr kumimoji="1" sz="1600">
+                <a:solidFill>
+                  <a:schemeClr val="tx1"/>
+                </a:solidFill>
+                <a:latin typeface="Verdana" pitchFamily="34" charset="0"/>
+                <a:ea typeface="+mn-ea"/>
+              </a:defRPr>
+            </a:lvl5pPr>
+            <a:lvl6pPr marL="2514600" indent="-228600" algn="l" rtl="0" fontAlgn="base" latinLnBrk="1">
+              <a:spcBef>
+                <a:spcPct val="20000"/>
+              </a:spcBef>
+              <a:spcAft>
+                <a:spcPct val="0"/>
+              </a:spcAft>
+              <a:buClr>
+                <a:schemeClr val="bg2"/>
+              </a:buClr>
+              <a:buFont typeface="Arial" charset="0"/>
+              <a:buChar char="»"/>
+              <a:defRPr kumimoji="1" sz="1600">
+                <a:solidFill>
+                  <a:schemeClr val="tx1"/>
+                </a:solidFill>
+                <a:latin typeface="Arial" charset="0"/>
+                <a:ea typeface="+mn-ea"/>
+              </a:defRPr>
+            </a:lvl6pPr>
+            <a:lvl7pPr marL="2971800" indent="-228600" algn="l" rtl="0" fontAlgn="base" latinLnBrk="1">
+              <a:spcBef>
+                <a:spcPct val="20000"/>
+              </a:spcBef>
+              <a:spcAft>
+                <a:spcPct val="0"/>
+              </a:spcAft>
+              <a:buClr>
+                <a:schemeClr val="bg2"/>
+              </a:buClr>
+              <a:buFont typeface="Arial" charset="0"/>
+              <a:buChar char="»"/>
+              <a:defRPr kumimoji="1" sz="1600">
+                <a:solidFill>
+                  <a:schemeClr val="tx1"/>
+                </a:solidFill>
+                <a:latin typeface="Arial" charset="0"/>
+                <a:ea typeface="+mn-ea"/>
+              </a:defRPr>
+            </a:lvl7pPr>
+            <a:lvl8pPr marL="3429000" indent="-228600" algn="l" rtl="0" fontAlgn="base" latinLnBrk="1">
+              <a:spcBef>
+                <a:spcPct val="20000"/>
+              </a:spcBef>
+              <a:spcAft>
+                <a:spcPct val="0"/>
+              </a:spcAft>
+              <a:buClr>
+                <a:schemeClr val="bg2"/>
+              </a:buClr>
+              <a:buFont typeface="Arial" charset="0"/>
+              <a:buChar char="»"/>
+              <a:defRPr kumimoji="1" sz="1600">
+                <a:solidFill>
+                  <a:schemeClr val="tx1"/>
+                </a:solidFill>
+                <a:latin typeface="Arial" charset="0"/>
+                <a:ea typeface="+mn-ea"/>
+              </a:defRPr>
+            </a:lvl8pPr>
+            <a:lvl9pPr marL="3886200" indent="-228600" algn="l" rtl="0" fontAlgn="base" latinLnBrk="1">
+              <a:spcBef>
+                <a:spcPct val="20000"/>
+              </a:spcBef>
+              <a:spcAft>
+                <a:spcPct val="0"/>
+              </a:spcAft>
+              <a:buClr>
+                <a:schemeClr val="bg2"/>
+              </a:buClr>
+              <a:buFont typeface="Arial" charset="0"/>
+              <a:buChar char="»"/>
+              <a:defRPr kumimoji="1" sz="1600">
+                <a:solidFill>
+                  <a:schemeClr val="tx1"/>
+                </a:solidFill>
+                <a:latin typeface="Arial" charset="0"/>
+                <a:ea typeface="+mn-ea"/>
+              </a:defRPr>
+            </a:lvl9pPr>
+          </a:lstStyle>
+          <a:p>
+            <a:r>
+              <a:rPr lang="en-US" altLang="ko-KR" b="0" i="0" kern="0"/>
+              <a:t>IS61WV51216xLL</a:t>
+            </a:r>
+            <a:endParaRPr lang="en-US" altLang="ko-KR" b="0" i="0" kern="0" dirty="0"/>
+          </a:p>
+        </p:txBody>
+      </p:sp>
+      <p:pic>
+        <p:nvPicPr>
+          <p:cNvPr id="5" name="그림 4" descr="텍스트, 도표, 스크린샷, 평행이(가) 표시된 사진&#10;&#10;AI 생성 콘텐츠는 정확하지 않을 수 있습니다.">
+            <a:extLst>
+              <a:ext uri="{FF2B5EF4-FFF2-40B4-BE49-F238E27FC236}">
+                <a16:creationId xmlns:a16="http://schemas.microsoft.com/office/drawing/2014/main" id="{EA4A89C5-7EBD-7385-1887-5EA66CEB61EC}"/>
+              </a:ext>
+            </a:extLst>
+          </p:cNvPr>
+          <p:cNvPicPr>
+            <a:picLocks noChangeAspect="1"/>
+          </p:cNvPicPr>
+          <p:nvPr/>
+        </p:nvPicPr>
+        <p:blipFill>
+          <a:blip r:embed="rId2"/>
+          <a:stretch>
+            <a:fillRect/>
+          </a:stretch>
+        </p:blipFill>
+        <p:spPr>
+          <a:xfrm>
+            <a:off x="1259632" y="1207509"/>
+            <a:ext cx="6978922" cy="5147511"/>
+          </a:xfrm>
+          <a:prstGeom prst="rect">
+            <a:avLst/>
+          </a:prstGeom>
+        </p:spPr>
+      </p:pic>
+    </p:spTree>
+    <p:extLst>
+      <p:ext uri="{BB962C8B-B14F-4D97-AF65-F5344CB8AC3E}">
+        <p14:creationId xmlns:p14="http://schemas.microsoft.com/office/powerpoint/2010/main" val="178945844"/>
+      </p:ext>
+    </p:extLst>
+  </p:cSld>
+  <p:clrMapOvr>
+    <a:masterClrMapping/>
+  </p:clrMapOvr>
+</p:sld>
+</file>
+
+<file path=ppt/slides/slide52.xml><?xml version="1.0" encoding="utf-8"?>
+<p:sld xmlns:a="http://schemas.openxmlformats.org/drawingml/2006/main" xmlns:r="http://schemas.openxmlformats.org/officeDocument/2006/relationships" xmlns:p="http://schemas.openxmlformats.org/presentationml/2006/main">
+  <p:cSld>
+    <p:spTree>
+      <p:nvGrpSpPr>
+        <p:cNvPr id="1" name="">
+          <a:extLst>
+            <a:ext uri="{FF2B5EF4-FFF2-40B4-BE49-F238E27FC236}">
               <a16:creationId xmlns:a16="http://schemas.microsoft.com/office/drawing/2014/main" id="{E595DE1D-E4B7-28C5-6737-5F53B9510FD3}"/>
             </a:ext>
           </a:extLst>
@@ -19442,7 +20064,7 @@
 </p:sld>
 </file>
 
-<file path=ppt/slides/slide51.xml><?xml version="1.0" encoding="utf-8"?>
+<file path=ppt/slides/slide53.xml><?xml version="1.0" encoding="utf-8"?>
 <p:sld xmlns:a="http://schemas.openxmlformats.org/drawingml/2006/main" xmlns:r="http://schemas.openxmlformats.org/officeDocument/2006/relationships" xmlns:p="http://schemas.openxmlformats.org/presentationml/2006/main">
   <p:cSld>
     <p:spTree>
@@ -19765,7 +20387,7 @@
 </p:sld>
 </file>
 
-<file path=ppt/slides/slide52.xml><?xml version="1.0" encoding="utf-8"?>
+<file path=ppt/slides/slide54.xml><?xml version="1.0" encoding="utf-8"?>
 <p:sld xmlns:a="http://schemas.openxmlformats.org/drawingml/2006/main" xmlns:r="http://schemas.openxmlformats.org/officeDocument/2006/relationships" xmlns:p="http://schemas.openxmlformats.org/presentationml/2006/main">
   <p:cSld>
     <p:spTree>
@@ -20085,7 +20707,7 @@
 </p:sld>
 </file>
 
-<file path=ppt/slides/slide53.xml><?xml version="1.0" encoding="utf-8"?>
+<file path=ppt/slides/slide55.xml><?xml version="1.0" encoding="utf-8"?>
 <p:sld xmlns:a="http://schemas.openxmlformats.org/drawingml/2006/main" xmlns:r="http://schemas.openxmlformats.org/officeDocument/2006/relationships" xmlns:p="http://schemas.openxmlformats.org/presentationml/2006/main">
   <p:cSld>
     <p:spTree>
